--- a/Presentation.pptx
+++ b/Presentation.pptx
@@ -5,15 +5,15 @@
     <p:sldMasterId id="2147483648" r:id="rId1"/>
   </p:sldMasterIdLst>
   <p:sldIdLst>
-    <p:sldId id="256" r:id="rId7"/>
-    <p:sldId id="257" r:id="rId8"/>
-    <p:sldId id="258" r:id="rId9"/>
-    <p:sldId id="259" r:id="rId10"/>
-    <p:sldId id="260" r:id="rId11"/>
-    <p:sldId id="261" r:id="rId12"/>
-    <p:sldId id="262" r:id="rId13"/>
+    <p:sldId id="256" r:id="rId2"/>
+    <p:sldId id="257" r:id="rId3"/>
+    <p:sldId id="258" r:id="rId4"/>
+    <p:sldId id="259" r:id="rId5"/>
+    <p:sldId id="260" r:id="rId6"/>
+    <p:sldId id="261" r:id="rId7"/>
+    <p:sldId id="262" r:id="rId8"/>
   </p:sldIdLst>
-  <p:sldSz cx="12191695" cy="6858000" type="screen4x3"/>
+  <p:sldSz cx="12192000" cy="6858000"/>
   <p:notesSz cx="6858000" cy="9144000"/>
   <p:defaultTextStyle>
     <a:defPPr>
@@ -110,6 +110,22 @@
       </a:defRPr>
     </a:lvl9pPr>
   </p:defaultTextStyle>
+  <p:extLst>
+    <p:ext uri="{EFAFB233-063F-42B5-8137-9DF3F51BA10A}">
+      <p15:sldGuideLst xmlns:p15="http://schemas.microsoft.com/office/powerpoint/2012/main">
+        <p15:guide id="1" orient="horz" pos="2160">
+          <p15:clr>
+            <a:srgbClr val="A4A3A4"/>
+          </p15:clr>
+        </p15:guide>
+        <p15:guide id="2" pos="2880">
+          <p15:clr>
+            <a:srgbClr val="A4A3A4"/>
+          </p15:clr>
+        </p15:guide>
+      </p15:sldGuideLst>
+    </p:ext>
+  </p:extLst>
 </p:presentation>
 </file>
 
@@ -151,10 +167,9 @@
           <a:lstStyle/>
           <a:p>
             <a:r>
-              <a:rPr lang="en-US" smtClean="0"/>
+              <a:rPr lang="en-US"/>
               <a:t>Click to edit Master title style</a:t>
             </a:r>
-            <a:endParaRPr lang="en-US"/>
           </a:p>
         </p:txBody>
       </p:sp>
@@ -270,10 +285,9 @@
           </a:lstStyle>
           <a:p>
             <a:r>
-              <a:rPr lang="en-US" smtClean="0"/>
+              <a:rPr lang="en-US"/>
               <a:t>Click to edit Master subtitle style</a:t>
             </a:r>
-            <a:endParaRPr lang="en-US"/>
           </a:p>
         </p:txBody>
       </p:sp>
@@ -294,7 +308,7 @@
           <a:p>
             <a:fld id="{5BCAD085-E8A6-8845-BD4E-CB4CCA059FC4}" type="datetimeFigureOut">
               <a:rPr lang="en-US" smtClean="0"/>
-              <a:t>1/27/13</a:t>
+              <a:t>4/13/2026</a:t>
             </a:fld>
             <a:endParaRPr lang="en-US"/>
           </a:p>
@@ -388,10 +402,9 @@
           <a:lstStyle/>
           <a:p>
             <a:r>
-              <a:rPr lang="en-US" smtClean="0"/>
+              <a:rPr lang="en-US"/>
               <a:t>Click to edit Master title style</a:t>
             </a:r>
-            <a:endParaRPr lang="en-US"/>
           </a:p>
         </p:txBody>
       </p:sp>
@@ -412,38 +425,37 @@
           <a:p>
             <a:pPr lvl="0"/>
             <a:r>
-              <a:rPr lang="en-US" smtClean="0"/>
+              <a:rPr lang="en-US"/>
               <a:t>Click to edit Master text styles</a:t>
             </a:r>
           </a:p>
           <a:p>
             <a:pPr lvl="1"/>
             <a:r>
-              <a:rPr lang="en-US" smtClean="0"/>
+              <a:rPr lang="en-US"/>
               <a:t>Second level</a:t>
             </a:r>
           </a:p>
           <a:p>
             <a:pPr lvl="2"/>
             <a:r>
-              <a:rPr lang="en-US" smtClean="0"/>
+              <a:rPr lang="en-US"/>
               <a:t>Third level</a:t>
             </a:r>
           </a:p>
           <a:p>
             <a:pPr lvl="3"/>
             <a:r>
-              <a:rPr lang="en-US" smtClean="0"/>
+              <a:rPr lang="en-US"/>
               <a:t>Fourth level</a:t>
             </a:r>
           </a:p>
           <a:p>
             <a:pPr lvl="4"/>
             <a:r>
-              <a:rPr lang="en-US" smtClean="0"/>
+              <a:rPr lang="en-US"/>
               <a:t>Fifth level</a:t>
             </a:r>
-            <a:endParaRPr lang="en-US"/>
           </a:p>
         </p:txBody>
       </p:sp>
@@ -464,7 +476,7 @@
           <a:p>
             <a:fld id="{5BCAD085-E8A6-8845-BD4E-CB4CCA059FC4}" type="datetimeFigureOut">
               <a:rPr lang="en-US" smtClean="0"/>
-              <a:t>1/27/13</a:t>
+              <a:t>4/13/2026</a:t>
             </a:fld>
             <a:endParaRPr lang="en-US"/>
           </a:p>
@@ -563,10 +575,9 @@
           <a:lstStyle/>
           <a:p>
             <a:r>
-              <a:rPr lang="en-US" smtClean="0"/>
+              <a:rPr lang="en-US"/>
               <a:t>Click to edit Master title style</a:t>
             </a:r>
-            <a:endParaRPr lang="en-US"/>
           </a:p>
         </p:txBody>
       </p:sp>
@@ -592,38 +603,37 @@
           <a:p>
             <a:pPr lvl="0"/>
             <a:r>
-              <a:rPr lang="en-US" smtClean="0"/>
+              <a:rPr lang="en-US"/>
               <a:t>Click to edit Master text styles</a:t>
             </a:r>
           </a:p>
           <a:p>
             <a:pPr lvl="1"/>
             <a:r>
-              <a:rPr lang="en-US" smtClean="0"/>
+              <a:rPr lang="en-US"/>
               <a:t>Second level</a:t>
             </a:r>
           </a:p>
           <a:p>
             <a:pPr lvl="2"/>
             <a:r>
-              <a:rPr lang="en-US" smtClean="0"/>
+              <a:rPr lang="en-US"/>
               <a:t>Third level</a:t>
             </a:r>
           </a:p>
           <a:p>
             <a:pPr lvl="3"/>
             <a:r>
-              <a:rPr lang="en-US" smtClean="0"/>
+              <a:rPr lang="en-US"/>
               <a:t>Fourth level</a:t>
             </a:r>
           </a:p>
           <a:p>
             <a:pPr lvl="4"/>
             <a:r>
-              <a:rPr lang="en-US" smtClean="0"/>
+              <a:rPr lang="en-US"/>
               <a:t>Fifth level</a:t>
             </a:r>
-            <a:endParaRPr lang="en-US"/>
           </a:p>
         </p:txBody>
       </p:sp>
@@ -644,7 +654,7 @@
           <a:p>
             <a:fld id="{5BCAD085-E8A6-8845-BD4E-CB4CCA059FC4}" type="datetimeFigureOut">
               <a:rPr lang="en-US" smtClean="0"/>
-              <a:t>1/27/13</a:t>
+              <a:t>4/13/2026</a:t>
             </a:fld>
             <a:endParaRPr lang="en-US"/>
           </a:p>
@@ -738,10 +748,9 @@
           <a:lstStyle/>
           <a:p>
             <a:r>
-              <a:rPr lang="en-US" smtClean="0"/>
+              <a:rPr lang="en-US"/>
               <a:t>Click to edit Master title style</a:t>
             </a:r>
-            <a:endParaRPr lang="en-US"/>
           </a:p>
         </p:txBody>
       </p:sp>
@@ -762,38 +771,37 @@
           <a:p>
             <a:pPr lvl="0"/>
             <a:r>
-              <a:rPr lang="en-US" smtClean="0"/>
+              <a:rPr lang="en-US"/>
               <a:t>Click to edit Master text styles</a:t>
             </a:r>
           </a:p>
           <a:p>
             <a:pPr lvl="1"/>
             <a:r>
-              <a:rPr lang="en-US" smtClean="0"/>
+              <a:rPr lang="en-US"/>
               <a:t>Second level</a:t>
             </a:r>
           </a:p>
           <a:p>
             <a:pPr lvl="2"/>
             <a:r>
-              <a:rPr lang="en-US" smtClean="0"/>
+              <a:rPr lang="en-US"/>
               <a:t>Third level</a:t>
             </a:r>
           </a:p>
           <a:p>
             <a:pPr lvl="3"/>
             <a:r>
-              <a:rPr lang="en-US" smtClean="0"/>
+              <a:rPr lang="en-US"/>
               <a:t>Fourth level</a:t>
             </a:r>
           </a:p>
           <a:p>
             <a:pPr lvl="4"/>
             <a:r>
-              <a:rPr lang="en-US" smtClean="0"/>
+              <a:rPr lang="en-US"/>
               <a:t>Fifth level</a:t>
             </a:r>
-            <a:endParaRPr lang="en-US"/>
           </a:p>
         </p:txBody>
       </p:sp>
@@ -814,7 +822,7 @@
           <a:p>
             <a:fld id="{5BCAD085-E8A6-8845-BD4E-CB4CCA059FC4}" type="datetimeFigureOut">
               <a:rPr lang="en-US" smtClean="0"/>
-              <a:t>1/27/13</a:t>
+              <a:t>4/13/2026</a:t>
             </a:fld>
             <a:endParaRPr lang="en-US"/>
           </a:p>
@@ -917,10 +925,9 @@
           </a:lstStyle>
           <a:p>
             <a:r>
-              <a:rPr lang="en-US" smtClean="0"/>
+              <a:rPr lang="en-US"/>
               <a:t>Click to edit Master title style</a:t>
             </a:r>
-            <a:endParaRPr lang="en-US"/>
           </a:p>
         </p:txBody>
       </p:sp>
@@ -1037,7 +1044,7 @@
           <a:p>
             <a:pPr lvl="0"/>
             <a:r>
-              <a:rPr lang="en-US" smtClean="0"/>
+              <a:rPr lang="en-US"/>
               <a:t>Click to edit Master text styles</a:t>
             </a:r>
           </a:p>
@@ -1060,7 +1067,7 @@
           <a:p>
             <a:fld id="{5BCAD085-E8A6-8845-BD4E-CB4CCA059FC4}" type="datetimeFigureOut">
               <a:rPr lang="en-US" smtClean="0"/>
-              <a:t>1/27/13</a:t>
+              <a:t>4/13/2026</a:t>
             </a:fld>
             <a:endParaRPr lang="en-US"/>
           </a:p>
@@ -1154,10 +1161,9 @@
           <a:lstStyle/>
           <a:p>
             <a:r>
-              <a:rPr lang="en-US" smtClean="0"/>
+              <a:rPr lang="en-US"/>
               <a:t>Click to edit Master title style</a:t>
             </a:r>
-            <a:endParaRPr lang="en-US"/>
           </a:p>
         </p:txBody>
       </p:sp>
@@ -1211,38 +1217,37 @@
           <a:p>
             <a:pPr lvl="0"/>
             <a:r>
-              <a:rPr lang="en-US" smtClean="0"/>
+              <a:rPr lang="en-US"/>
               <a:t>Click to edit Master text styles</a:t>
             </a:r>
           </a:p>
           <a:p>
             <a:pPr lvl="1"/>
             <a:r>
-              <a:rPr lang="en-US" smtClean="0"/>
+              <a:rPr lang="en-US"/>
               <a:t>Second level</a:t>
             </a:r>
           </a:p>
           <a:p>
             <a:pPr lvl="2"/>
             <a:r>
-              <a:rPr lang="en-US" smtClean="0"/>
+              <a:rPr lang="en-US"/>
               <a:t>Third level</a:t>
             </a:r>
           </a:p>
           <a:p>
             <a:pPr lvl="3"/>
             <a:r>
-              <a:rPr lang="en-US" smtClean="0"/>
+              <a:rPr lang="en-US"/>
               <a:t>Fourth level</a:t>
             </a:r>
           </a:p>
           <a:p>
             <a:pPr lvl="4"/>
             <a:r>
-              <a:rPr lang="en-US" smtClean="0"/>
+              <a:rPr lang="en-US"/>
               <a:t>Fifth level</a:t>
             </a:r>
-            <a:endParaRPr lang="en-US"/>
           </a:p>
         </p:txBody>
       </p:sp>
@@ -1296,38 +1301,37 @@
           <a:p>
             <a:pPr lvl="0"/>
             <a:r>
-              <a:rPr lang="en-US" smtClean="0"/>
+              <a:rPr lang="en-US"/>
               <a:t>Click to edit Master text styles</a:t>
             </a:r>
           </a:p>
           <a:p>
             <a:pPr lvl="1"/>
             <a:r>
-              <a:rPr lang="en-US" smtClean="0"/>
+              <a:rPr lang="en-US"/>
               <a:t>Second level</a:t>
             </a:r>
           </a:p>
           <a:p>
             <a:pPr lvl="2"/>
             <a:r>
-              <a:rPr lang="en-US" smtClean="0"/>
+              <a:rPr lang="en-US"/>
               <a:t>Third level</a:t>
             </a:r>
           </a:p>
           <a:p>
             <a:pPr lvl="3"/>
             <a:r>
-              <a:rPr lang="en-US" smtClean="0"/>
+              <a:rPr lang="en-US"/>
               <a:t>Fourth level</a:t>
             </a:r>
           </a:p>
           <a:p>
             <a:pPr lvl="4"/>
             <a:r>
-              <a:rPr lang="en-US" smtClean="0"/>
+              <a:rPr lang="en-US"/>
               <a:t>Fifth level</a:t>
             </a:r>
-            <a:endParaRPr lang="en-US"/>
           </a:p>
         </p:txBody>
       </p:sp>
@@ -1348,7 +1352,7 @@
           <a:p>
             <a:fld id="{5BCAD085-E8A6-8845-BD4E-CB4CCA059FC4}" type="datetimeFigureOut">
               <a:rPr lang="en-US" smtClean="0"/>
-              <a:t>1/27/13</a:t>
+              <a:t>4/13/2026</a:t>
             </a:fld>
             <a:endParaRPr lang="en-US"/>
           </a:p>
@@ -1446,10 +1450,9 @@
           </a:lstStyle>
           <a:p>
             <a:r>
-              <a:rPr lang="en-US" smtClean="0"/>
+              <a:rPr lang="en-US"/>
               <a:t>Click to edit Master title style</a:t>
             </a:r>
-            <a:endParaRPr lang="en-US"/>
           </a:p>
         </p:txBody>
       </p:sp>
@@ -1512,7 +1515,7 @@
           <a:p>
             <a:pPr lvl="0"/>
             <a:r>
-              <a:rPr lang="en-US" smtClean="0"/>
+              <a:rPr lang="en-US"/>
               <a:t>Click to edit Master text styles</a:t>
             </a:r>
           </a:p>
@@ -1568,38 +1571,37 @@
           <a:p>
             <a:pPr lvl="0"/>
             <a:r>
-              <a:rPr lang="en-US" smtClean="0"/>
+              <a:rPr lang="en-US"/>
               <a:t>Click to edit Master text styles</a:t>
             </a:r>
           </a:p>
           <a:p>
             <a:pPr lvl="1"/>
             <a:r>
-              <a:rPr lang="en-US" smtClean="0"/>
+              <a:rPr lang="en-US"/>
               <a:t>Second level</a:t>
             </a:r>
           </a:p>
           <a:p>
             <a:pPr lvl="2"/>
             <a:r>
-              <a:rPr lang="en-US" smtClean="0"/>
+              <a:rPr lang="en-US"/>
               <a:t>Third level</a:t>
             </a:r>
           </a:p>
           <a:p>
             <a:pPr lvl="3"/>
             <a:r>
-              <a:rPr lang="en-US" smtClean="0"/>
+              <a:rPr lang="en-US"/>
               <a:t>Fourth level</a:t>
             </a:r>
           </a:p>
           <a:p>
             <a:pPr lvl="4"/>
             <a:r>
-              <a:rPr lang="en-US" smtClean="0"/>
+              <a:rPr lang="en-US"/>
               <a:t>Fifth level</a:t>
             </a:r>
-            <a:endParaRPr lang="en-US"/>
           </a:p>
         </p:txBody>
       </p:sp>
@@ -1662,7 +1664,7 @@
           <a:p>
             <a:pPr lvl="0"/>
             <a:r>
-              <a:rPr lang="en-US" smtClean="0"/>
+              <a:rPr lang="en-US"/>
               <a:t>Click to edit Master text styles</a:t>
             </a:r>
           </a:p>
@@ -1718,38 +1720,37 @@
           <a:p>
             <a:pPr lvl="0"/>
             <a:r>
-              <a:rPr lang="en-US" smtClean="0"/>
+              <a:rPr lang="en-US"/>
               <a:t>Click to edit Master text styles</a:t>
             </a:r>
           </a:p>
           <a:p>
             <a:pPr lvl="1"/>
             <a:r>
-              <a:rPr lang="en-US" smtClean="0"/>
+              <a:rPr lang="en-US"/>
               <a:t>Second level</a:t>
             </a:r>
           </a:p>
           <a:p>
             <a:pPr lvl="2"/>
             <a:r>
-              <a:rPr lang="en-US" smtClean="0"/>
+              <a:rPr lang="en-US"/>
               <a:t>Third level</a:t>
             </a:r>
           </a:p>
           <a:p>
             <a:pPr lvl="3"/>
             <a:r>
-              <a:rPr lang="en-US" smtClean="0"/>
+              <a:rPr lang="en-US"/>
               <a:t>Fourth level</a:t>
             </a:r>
           </a:p>
           <a:p>
             <a:pPr lvl="4"/>
             <a:r>
-              <a:rPr lang="en-US" smtClean="0"/>
+              <a:rPr lang="en-US"/>
               <a:t>Fifth level</a:t>
             </a:r>
-            <a:endParaRPr lang="en-US"/>
           </a:p>
         </p:txBody>
       </p:sp>
@@ -1770,7 +1771,7 @@
           <a:p>
             <a:fld id="{5BCAD085-E8A6-8845-BD4E-CB4CCA059FC4}" type="datetimeFigureOut">
               <a:rPr lang="en-US" smtClean="0"/>
-              <a:t>1/27/13</a:t>
+              <a:t>4/13/2026</a:t>
             </a:fld>
             <a:endParaRPr lang="en-US"/>
           </a:p>
@@ -1864,10 +1865,9 @@
           <a:lstStyle/>
           <a:p>
             <a:r>
-              <a:rPr lang="en-US" smtClean="0"/>
+              <a:rPr lang="en-US"/>
               <a:t>Click to edit Master title style</a:t>
             </a:r>
-            <a:endParaRPr lang="en-US"/>
           </a:p>
         </p:txBody>
       </p:sp>
@@ -1888,7 +1888,7 @@
           <a:p>
             <a:fld id="{5BCAD085-E8A6-8845-BD4E-CB4CCA059FC4}" type="datetimeFigureOut">
               <a:rPr lang="en-US" smtClean="0"/>
-              <a:t>1/27/13</a:t>
+              <a:t>4/13/2026</a:t>
             </a:fld>
             <a:endParaRPr lang="en-US"/>
           </a:p>
@@ -1983,7 +1983,7 @@
           <a:p>
             <a:fld id="{5BCAD085-E8A6-8845-BD4E-CB4CCA059FC4}" type="datetimeFigureOut">
               <a:rPr lang="en-US" smtClean="0"/>
-              <a:t>1/27/13</a:t>
+              <a:t>4/13/2026</a:t>
             </a:fld>
             <a:endParaRPr lang="en-US"/>
           </a:p>
@@ -2086,10 +2086,9 @@
           </a:lstStyle>
           <a:p>
             <a:r>
-              <a:rPr lang="en-US" smtClean="0"/>
+              <a:rPr lang="en-US"/>
               <a:t>Click to edit Master title style</a:t>
             </a:r>
-            <a:endParaRPr lang="en-US"/>
           </a:p>
         </p:txBody>
       </p:sp>
@@ -2143,38 +2142,37 @@
           <a:p>
             <a:pPr lvl="0"/>
             <a:r>
-              <a:rPr lang="en-US" smtClean="0"/>
+              <a:rPr lang="en-US"/>
               <a:t>Click to edit Master text styles</a:t>
             </a:r>
           </a:p>
           <a:p>
             <a:pPr lvl="1"/>
             <a:r>
-              <a:rPr lang="en-US" smtClean="0"/>
+              <a:rPr lang="en-US"/>
               <a:t>Second level</a:t>
             </a:r>
           </a:p>
           <a:p>
             <a:pPr lvl="2"/>
             <a:r>
-              <a:rPr lang="en-US" smtClean="0"/>
+              <a:rPr lang="en-US"/>
               <a:t>Third level</a:t>
             </a:r>
           </a:p>
           <a:p>
             <a:pPr lvl="3"/>
             <a:r>
-              <a:rPr lang="en-US" smtClean="0"/>
+              <a:rPr lang="en-US"/>
               <a:t>Fourth level</a:t>
             </a:r>
           </a:p>
           <a:p>
             <a:pPr lvl="4"/>
             <a:r>
-              <a:rPr lang="en-US" smtClean="0"/>
+              <a:rPr lang="en-US"/>
               <a:t>Fifth level</a:t>
             </a:r>
-            <a:endParaRPr lang="en-US"/>
           </a:p>
         </p:txBody>
       </p:sp>
@@ -2237,7 +2235,7 @@
           <a:p>
             <a:pPr lvl="0"/>
             <a:r>
-              <a:rPr lang="en-US" smtClean="0"/>
+              <a:rPr lang="en-US"/>
               <a:t>Click to edit Master text styles</a:t>
             </a:r>
           </a:p>
@@ -2260,7 +2258,7 @@
           <a:p>
             <a:fld id="{5BCAD085-E8A6-8845-BD4E-CB4CCA059FC4}" type="datetimeFigureOut">
               <a:rPr lang="en-US" smtClean="0"/>
-              <a:t>1/27/13</a:t>
+              <a:t>4/13/2026</a:t>
             </a:fld>
             <a:endParaRPr lang="en-US"/>
           </a:p>
@@ -2363,10 +2361,9 @@
           </a:lstStyle>
           <a:p>
             <a:r>
-              <a:rPr lang="en-US" smtClean="0"/>
+              <a:rPr lang="en-US"/>
               <a:t>Click to edit Master title style</a:t>
             </a:r>
-            <a:endParaRPr lang="en-US"/>
           </a:p>
         </p:txBody>
       </p:sp>
@@ -2490,7 +2487,7 @@
           <a:p>
             <a:pPr lvl="0"/>
             <a:r>
-              <a:rPr lang="en-US" smtClean="0"/>
+              <a:rPr lang="en-US"/>
               <a:t>Click to edit Master text styles</a:t>
             </a:r>
           </a:p>
@@ -2513,7 +2510,7 @@
           <a:p>
             <a:fld id="{5BCAD085-E8A6-8845-BD4E-CB4CCA059FC4}" type="datetimeFigureOut">
               <a:rPr lang="en-US" smtClean="0"/>
-              <a:t>1/27/13</a:t>
+              <a:t>4/13/2026</a:t>
             </a:fld>
             <a:endParaRPr lang="en-US"/>
           </a:p>
@@ -2622,10 +2619,9 @@
           <a:lstStyle/>
           <a:p>
             <a:r>
-              <a:rPr lang="en-US" smtClean="0"/>
+              <a:rPr lang="en-US"/>
               <a:t>Click to edit Master title style</a:t>
             </a:r>
-            <a:endParaRPr lang="en-US"/>
           </a:p>
         </p:txBody>
       </p:sp>
@@ -2656,38 +2652,37 @@
           <a:p>
             <a:pPr lvl="0"/>
             <a:r>
-              <a:rPr lang="en-US" smtClean="0"/>
+              <a:rPr lang="en-US"/>
               <a:t>Click to edit Master text styles</a:t>
             </a:r>
           </a:p>
           <a:p>
             <a:pPr lvl="1"/>
             <a:r>
-              <a:rPr lang="en-US" smtClean="0"/>
+              <a:rPr lang="en-US"/>
               <a:t>Second level</a:t>
             </a:r>
           </a:p>
           <a:p>
             <a:pPr lvl="2"/>
             <a:r>
-              <a:rPr lang="en-US" smtClean="0"/>
+              <a:rPr lang="en-US"/>
               <a:t>Third level</a:t>
             </a:r>
           </a:p>
           <a:p>
             <a:pPr lvl="3"/>
             <a:r>
-              <a:rPr lang="en-US" smtClean="0"/>
+              <a:rPr lang="en-US"/>
               <a:t>Fourth level</a:t>
             </a:r>
           </a:p>
           <a:p>
             <a:pPr lvl="4"/>
             <a:r>
-              <a:rPr lang="en-US" smtClean="0"/>
+              <a:rPr lang="en-US"/>
               <a:t>Fifth level</a:t>
             </a:r>
-            <a:endParaRPr lang="en-US"/>
           </a:p>
         </p:txBody>
       </p:sp>
@@ -2726,7 +2721,7 @@
           <a:p>
             <a:fld id="{5BCAD085-E8A6-8845-BD4E-CB4CCA059FC4}" type="datetimeFigureOut">
               <a:rPr lang="en-US" smtClean="0"/>
-              <a:t>1/27/13</a:t>
+              <a:t>4/13/2026</a:t>
             </a:fld>
             <a:endParaRPr lang="en-US"/>
           </a:p>
@@ -3085,7 +3080,7 @@
 </file>
 
 <file path=ppt/slides/slide1.xml><?xml version="1.0" encoding="utf-8"?>
-<p:sld xmlns:a="http://schemas.openxmlformats.org/drawingml/2006/main" xmlns:p="http://schemas.openxmlformats.org/presentationml/2006/main" xmlns:r="http://schemas.openxmlformats.org/officeDocument/2006/relationships">
+<p:sld xmlns:a="http://schemas.openxmlformats.org/drawingml/2006/main" xmlns:r="http://schemas.openxmlformats.org/officeDocument/2006/relationships" xmlns:p="http://schemas.openxmlformats.org/presentationml/2006/main">
   <p:cSld>
     <p:bg>
       <p:bgPr>
@@ -3101,7 +3096,14 @@
         <p:cNvGrpSpPr/>
         <p:nvPr/>
       </p:nvGrpSpPr>
-      <p:grpSpPr/>
+      <p:grpSpPr>
+        <a:xfrm>
+          <a:off x="0" y="0"/>
+          <a:ext cx="0" cy="0"/>
+          <a:chOff x="0" y="0"/>
+          <a:chExt cx="0" cy="0"/>
+        </a:xfrm>
+      </p:grpSpPr>
       <p:sp>
         <p:nvSpPr>
           <p:cNvPr id="2" name="Rectangle 1"/>
@@ -3142,25 +3144,26 @@
           <a:lstStyle/>
           <a:p>
             <a:pPr algn="ctr"/>
-          </a:p>
-        </p:txBody>
-      </p:sp>
-      <p:sp>
-        <p:nvSpPr>
-          <p:cNvPr id="3" name="Oval 2"/>
+            <a:endParaRPr/>
+          </a:p>
+        </p:txBody>
+      </p:sp>
+      <p:sp>
+        <p:nvSpPr>
+          <p:cNvPr id="5" name="Rectangle 4"/>
           <p:cNvSpPr/>
           <p:nvPr/>
         </p:nvSpPr>
         <p:spPr>
           <a:xfrm>
-            <a:off x="8686800" y="-914400"/>
-            <a:ext cx="4572000" cy="4572000"/>
-          </a:xfrm>
-          <a:prstGeom prst="ellipse">
+            <a:off x="731520" y="1280160"/>
+            <a:ext cx="2560320" cy="411480"/>
+          </a:xfrm>
+          <a:prstGeom prst="rect">
             <a:avLst/>
           </a:prstGeom>
           <a:solidFill>
-            <a:srgbClr val="1A3A6B"/>
+            <a:srgbClr val="2563EB"/>
           </a:solidFill>
           <a:ln>
             <a:noFill/>
@@ -3185,21 +3188,278 @@
           <a:lstStyle/>
           <a:p>
             <a:pPr algn="ctr"/>
-          </a:p>
-        </p:txBody>
-      </p:sp>
-      <p:sp>
-        <p:nvSpPr>
-          <p:cNvPr id="4" name="Oval 3"/>
+            <a:endParaRPr/>
+          </a:p>
+        </p:txBody>
+      </p:sp>
+      <p:sp>
+        <p:nvSpPr>
+          <p:cNvPr id="6" name="TextBox 5"/>
+          <p:cNvSpPr txBox="1"/>
+          <p:nvPr/>
+        </p:nvSpPr>
+        <p:spPr>
+          <a:xfrm>
+            <a:off x="731520" y="1280160"/>
+            <a:ext cx="2560320" cy="411480"/>
+          </a:xfrm>
+          <a:prstGeom prst="rect">
+            <a:avLst/>
+          </a:prstGeom>
+          <a:noFill/>
+        </p:spPr>
+        <p:txBody>
+          <a:bodyPr wrap="square">
+            <a:spAutoFit/>
+          </a:bodyPr>
+          <a:lstStyle/>
+          <a:p>
+            <a:pPr algn="ctr"/>
+            <a:r>
+              <a:rPr sz="900" b="1" i="0">
+                <a:solidFill>
+                  <a:srgbClr val="FFFFFF"/>
+                </a:solidFill>
+              </a:rPr>
+              <a:t>MACHINE LEARNING · AVRIL 2026</a:t>
+            </a:r>
+          </a:p>
+        </p:txBody>
+      </p:sp>
+      <p:sp>
+        <p:nvSpPr>
+          <p:cNvPr id="7" name="TextBox 6"/>
+          <p:cNvSpPr txBox="1"/>
+          <p:nvPr/>
+        </p:nvSpPr>
+        <p:spPr>
+          <a:xfrm>
+            <a:off x="731520" y="1828800"/>
+            <a:ext cx="7315200" cy="1005840"/>
+          </a:xfrm>
+          <a:prstGeom prst="rect">
+            <a:avLst/>
+          </a:prstGeom>
+          <a:noFill/>
+        </p:spPr>
+        <p:txBody>
+          <a:bodyPr wrap="square">
+            <a:spAutoFit/>
+          </a:bodyPr>
+          <a:lstStyle/>
+          <a:p>
+            <a:pPr algn="l"/>
+            <a:r>
+              <a:rPr sz="5600" b="1" i="0">
+                <a:solidFill>
+                  <a:srgbClr val="FFFFFF"/>
+                </a:solidFill>
+              </a:rPr>
+              <a:t>House Price</a:t>
+            </a:r>
+          </a:p>
+        </p:txBody>
+      </p:sp>
+      <p:sp>
+        <p:nvSpPr>
+          <p:cNvPr id="8" name="TextBox 7"/>
+          <p:cNvSpPr txBox="1"/>
+          <p:nvPr/>
+        </p:nvSpPr>
+        <p:spPr>
+          <a:xfrm>
+            <a:off x="731520" y="2743200"/>
+            <a:ext cx="7315200" cy="914400"/>
+          </a:xfrm>
+          <a:prstGeom prst="rect">
+            <a:avLst/>
+          </a:prstGeom>
+          <a:noFill/>
+        </p:spPr>
+        <p:txBody>
+          <a:bodyPr wrap="square">
+            <a:spAutoFit/>
+          </a:bodyPr>
+          <a:lstStyle/>
+          <a:p>
+            <a:pPr algn="l"/>
+            <a:r>
+              <a:rPr sz="5600" b="1" i="0">
+                <a:solidFill>
+                  <a:srgbClr val="2563EB"/>
+                </a:solidFill>
+              </a:rPr>
+              <a:t>Prediction</a:t>
+            </a:r>
+          </a:p>
+        </p:txBody>
+      </p:sp>
+      <p:sp>
+        <p:nvSpPr>
+          <p:cNvPr id="9" name="TextBox 8"/>
+          <p:cNvSpPr txBox="1"/>
+          <p:nvPr/>
+        </p:nvSpPr>
+        <p:spPr>
+          <a:xfrm>
+            <a:off x="731520" y="3749039"/>
+            <a:ext cx="8229600" cy="338554"/>
+          </a:xfrm>
+          <a:prstGeom prst="rect">
+            <a:avLst/>
+          </a:prstGeom>
+          <a:noFill/>
+        </p:spPr>
+        <p:txBody>
+          <a:bodyPr wrap="square">
+            <a:spAutoFit/>
+          </a:bodyPr>
+          <a:lstStyle/>
+          <a:p>
+            <a:pPr algn="l"/>
+            <a:r>
+              <a:rPr sz="1600" b="0" i="0" dirty="0" err="1">
+                <a:solidFill>
+                  <a:srgbClr val="94A3B8"/>
+                </a:solidFill>
+              </a:rPr>
+              <a:t>Prédiction</a:t>
+            </a:r>
+            <a:r>
+              <a:rPr sz="1600" b="0" i="0" dirty="0">
+                <a:solidFill>
+                  <a:srgbClr val="94A3B8"/>
+                </a:solidFill>
+              </a:rPr>
+              <a:t> du prix de vente de maisons </a:t>
+            </a:r>
+          </a:p>
+        </p:txBody>
+      </p:sp>
+      <p:sp>
+        <p:nvSpPr>
+          <p:cNvPr id="10" name="TextBox 9"/>
+          <p:cNvSpPr txBox="1"/>
+          <p:nvPr/>
+        </p:nvSpPr>
+        <p:spPr>
+          <a:xfrm>
+            <a:off x="731520" y="4251960"/>
+            <a:ext cx="9144000" cy="365760"/>
+          </a:xfrm>
+          <a:prstGeom prst="rect">
+            <a:avLst/>
+          </a:prstGeom>
+          <a:noFill/>
+        </p:spPr>
+        <p:txBody>
+          <a:bodyPr wrap="square">
+            <a:spAutoFit/>
+          </a:bodyPr>
+          <a:lstStyle/>
+          <a:p>
+            <a:pPr algn="l"/>
+            <a:r>
+              <a:rPr sz="1200" b="0" i="1">
+                <a:solidFill>
+                  <a:srgbClr val="64748B"/>
+                </a:solidFill>
+              </a:rPr>
+              <a:t>Pipeline End-to-End : EDA → Preprocessing → Feature Engineering → 3 Modèles → Optimisation</a:t>
+            </a:r>
+          </a:p>
+        </p:txBody>
+      </p:sp>
+      <p:sp>
+        <p:nvSpPr>
+          <p:cNvPr id="11" name="Rectangle 10"/>
           <p:cNvSpPr/>
           <p:nvPr/>
         </p:nvSpPr>
         <p:spPr>
           <a:xfrm>
-            <a:off x="9601200" y="4114800"/>
-            <a:ext cx="3200400" cy="3200400"/>
-          </a:xfrm>
-          <a:prstGeom prst="ellipse">
+            <a:off x="731520" y="4754880"/>
+            <a:ext cx="4572000" cy="27432"/>
+          </a:xfrm>
+          <a:prstGeom prst="rect">
+            <a:avLst/>
+          </a:prstGeom>
+          <a:solidFill>
+            <a:srgbClr val="2563EB"/>
+          </a:solidFill>
+          <a:ln>
+            <a:noFill/>
+          </a:ln>
+        </p:spPr>
+        <p:style>
+          <a:lnRef idx="1">
+            <a:schemeClr val="accent1"/>
+          </a:lnRef>
+          <a:fillRef idx="3">
+            <a:schemeClr val="accent1"/>
+          </a:fillRef>
+          <a:effectRef idx="2">
+            <a:schemeClr val="accent1"/>
+          </a:effectRef>
+          <a:fontRef idx="minor">
+            <a:schemeClr val="lt1"/>
+          </a:fontRef>
+        </p:style>
+        <p:txBody>
+          <a:bodyPr rtlCol="0" anchor="ctr"/>
+          <a:lstStyle/>
+          <a:p>
+            <a:pPr algn="ctr"/>
+            <a:endParaRPr/>
+          </a:p>
+        </p:txBody>
+      </p:sp>
+      <p:sp>
+        <p:nvSpPr>
+          <p:cNvPr id="12" name="TextBox 11"/>
+          <p:cNvSpPr txBox="1"/>
+          <p:nvPr/>
+        </p:nvSpPr>
+        <p:spPr>
+          <a:xfrm>
+            <a:off x="731520" y="4937760"/>
+            <a:ext cx="6400800" cy="365760"/>
+          </a:xfrm>
+          <a:prstGeom prst="rect">
+            <a:avLst/>
+          </a:prstGeom>
+          <a:noFill/>
+        </p:spPr>
+        <p:txBody>
+          <a:bodyPr wrap="square">
+            <a:spAutoFit/>
+          </a:bodyPr>
+          <a:lstStyle/>
+          <a:p>
+            <a:pPr algn="l"/>
+            <a:r>
+              <a:rPr sz="1300" b="0" i="0">
+                <a:solidFill>
+                  <a:srgbClr val="64748B"/>
+                </a:solidFill>
+              </a:rPr>
+              <a:t>[Votre Nom] · Machine Learning · [Institution]</a:t>
+            </a:r>
+          </a:p>
+        </p:txBody>
+      </p:sp>
+      <p:sp>
+        <p:nvSpPr>
+          <p:cNvPr id="13" name="Rectangle 12"/>
+          <p:cNvSpPr/>
+          <p:nvPr/>
+        </p:nvSpPr>
+        <p:spPr>
+          <a:xfrm>
+            <a:off x="9144000" y="5029200"/>
+            <a:ext cx="2286000" cy="1280160"/>
+          </a:xfrm>
+          <a:prstGeom prst="rect">
             <a:avLst/>
           </a:prstGeom>
           <a:solidFill>
@@ -3228,308 +3488,87 @@
           <a:lstStyle/>
           <a:p>
             <a:pPr algn="ctr"/>
-          </a:p>
-        </p:txBody>
-      </p:sp>
-      <p:sp>
-        <p:nvSpPr>
-          <p:cNvPr id="5" name="Rectangle 4"/>
+            <a:endParaRPr/>
+          </a:p>
+        </p:txBody>
+      </p:sp>
+      <p:sp>
+        <p:nvSpPr>
+          <p:cNvPr id="14" name="TextBox 13"/>
+          <p:cNvSpPr txBox="1"/>
+          <p:nvPr/>
+        </p:nvSpPr>
+        <p:spPr>
+          <a:xfrm>
+            <a:off x="9144000" y="5166360"/>
+            <a:ext cx="2286000" cy="685800"/>
+          </a:xfrm>
+          <a:prstGeom prst="rect">
+            <a:avLst/>
+          </a:prstGeom>
+          <a:noFill/>
+        </p:spPr>
+        <p:txBody>
+          <a:bodyPr wrap="square">
+            <a:spAutoFit/>
+          </a:bodyPr>
+          <a:lstStyle/>
+          <a:p>
+            <a:pPr algn="ctr"/>
+            <a:r>
+              <a:rPr sz="3400" b="1" i="0">
+                <a:solidFill>
+                  <a:srgbClr val="16A34A"/>
+                </a:solidFill>
+              </a:rPr>
+              <a:t>0.905</a:t>
+            </a:r>
+          </a:p>
+        </p:txBody>
+      </p:sp>
+      <p:sp>
+        <p:nvSpPr>
+          <p:cNvPr id="15" name="TextBox 14"/>
+          <p:cNvSpPr txBox="1"/>
+          <p:nvPr/>
+        </p:nvSpPr>
+        <p:spPr>
+          <a:xfrm>
+            <a:off x="9144000" y="5806440"/>
+            <a:ext cx="2286000" cy="411480"/>
+          </a:xfrm>
+          <a:prstGeom prst="rect">
+            <a:avLst/>
+          </a:prstGeom>
+          <a:noFill/>
+        </p:spPr>
+        <p:txBody>
+          <a:bodyPr wrap="square">
+            <a:spAutoFit/>
+          </a:bodyPr>
+          <a:lstStyle/>
+          <a:p>
+            <a:pPr algn="ctr"/>
+            <a:r>
+              <a:rPr sz="1100" b="0" i="0">
+                <a:solidFill>
+                  <a:srgbClr val="94A3B8"/>
+                </a:solidFill>
+              </a:rPr>
+              <a:t>R² Score</a:t>
+            </a:r>
+          </a:p>
+        </p:txBody>
+      </p:sp>
+      <p:sp>
+        <p:nvSpPr>
+          <p:cNvPr id="16" name="Rectangle 15"/>
           <p:cNvSpPr/>
           <p:nvPr/>
         </p:nvSpPr>
         <p:spPr>
           <a:xfrm>
-            <a:off x="731520" y="1280160"/>
-            <a:ext cx="2560320" cy="411480"/>
-          </a:xfrm>
-          <a:prstGeom prst="rect">
-            <a:avLst/>
-          </a:prstGeom>
-          <a:solidFill>
-            <a:srgbClr val="2563EB"/>
-          </a:solidFill>
-          <a:ln>
-            <a:noFill/>
-          </a:ln>
-        </p:spPr>
-        <p:style>
-          <a:lnRef idx="1">
-            <a:schemeClr val="accent1"/>
-          </a:lnRef>
-          <a:fillRef idx="3">
-            <a:schemeClr val="accent1"/>
-          </a:fillRef>
-          <a:effectRef idx="2">
-            <a:schemeClr val="accent1"/>
-          </a:effectRef>
-          <a:fontRef idx="minor">
-            <a:schemeClr val="lt1"/>
-          </a:fontRef>
-        </p:style>
-        <p:txBody>
-          <a:bodyPr rtlCol="0" anchor="ctr"/>
-          <a:lstStyle/>
-          <a:p>
-            <a:pPr algn="ctr"/>
-          </a:p>
-        </p:txBody>
-      </p:sp>
-      <p:sp>
-        <p:nvSpPr>
-          <p:cNvPr id="6" name="TextBox 5"/>
-          <p:cNvSpPr txBox="1"/>
-          <p:nvPr/>
-        </p:nvSpPr>
-        <p:spPr>
-          <a:xfrm>
-            <a:off x="731520" y="1280160"/>
-            <a:ext cx="2560320" cy="411480"/>
-          </a:xfrm>
-          <a:prstGeom prst="rect">
-            <a:avLst/>
-          </a:prstGeom>
-          <a:noFill/>
-        </p:spPr>
-        <p:txBody>
-          <a:bodyPr wrap="square">
-            <a:spAutoFit/>
-          </a:bodyPr>
-          <a:lstStyle/>
-          <a:p>
-            <a:pPr algn="ctr"/>
-            <a:r>
-              <a:rPr sz="900" b="1" i="0">
-                <a:solidFill>
-                  <a:srgbClr val="FFFFFF"/>
-                </a:solidFill>
-              </a:rPr>
-              <a:t>MACHINE LEARNING · AVRIL 2026</a:t>
-            </a:r>
-          </a:p>
-        </p:txBody>
-      </p:sp>
-      <p:sp>
-        <p:nvSpPr>
-          <p:cNvPr id="7" name="TextBox 6"/>
-          <p:cNvSpPr txBox="1"/>
-          <p:nvPr/>
-        </p:nvSpPr>
-        <p:spPr>
-          <a:xfrm>
-            <a:off x="731520" y="1828800"/>
-            <a:ext cx="7315200" cy="1005840"/>
-          </a:xfrm>
-          <a:prstGeom prst="rect">
-            <a:avLst/>
-          </a:prstGeom>
-          <a:noFill/>
-        </p:spPr>
-        <p:txBody>
-          <a:bodyPr wrap="square">
-            <a:spAutoFit/>
-          </a:bodyPr>
-          <a:lstStyle/>
-          <a:p>
-            <a:pPr algn="l"/>
-            <a:r>
-              <a:rPr sz="5600" b="1" i="0">
-                <a:solidFill>
-                  <a:srgbClr val="FFFFFF"/>
-                </a:solidFill>
-              </a:rPr>
-              <a:t>House Price</a:t>
-            </a:r>
-          </a:p>
-        </p:txBody>
-      </p:sp>
-      <p:sp>
-        <p:nvSpPr>
-          <p:cNvPr id="8" name="TextBox 7"/>
-          <p:cNvSpPr txBox="1"/>
-          <p:nvPr/>
-        </p:nvSpPr>
-        <p:spPr>
-          <a:xfrm>
-            <a:off x="731520" y="2743200"/>
-            <a:ext cx="7315200" cy="914400"/>
-          </a:xfrm>
-          <a:prstGeom prst="rect">
-            <a:avLst/>
-          </a:prstGeom>
-          <a:noFill/>
-        </p:spPr>
-        <p:txBody>
-          <a:bodyPr wrap="square">
-            <a:spAutoFit/>
-          </a:bodyPr>
-          <a:lstStyle/>
-          <a:p>
-            <a:pPr algn="l"/>
-            <a:r>
-              <a:rPr sz="5600" b="1" i="0">
-                <a:solidFill>
-                  <a:srgbClr val="2563EB"/>
-                </a:solidFill>
-              </a:rPr>
-              <a:t>Prediction</a:t>
-            </a:r>
-          </a:p>
-        </p:txBody>
-      </p:sp>
-      <p:sp>
-        <p:nvSpPr>
-          <p:cNvPr id="9" name="TextBox 8"/>
-          <p:cNvSpPr txBox="1"/>
-          <p:nvPr/>
-        </p:nvSpPr>
-        <p:spPr>
-          <a:xfrm>
-            <a:off x="731520" y="3749039"/>
-            <a:ext cx="8229600" cy="457200"/>
-          </a:xfrm>
-          <a:prstGeom prst="rect">
-            <a:avLst/>
-          </a:prstGeom>
-          <a:noFill/>
-        </p:spPr>
-        <p:txBody>
-          <a:bodyPr wrap="square">
-            <a:spAutoFit/>
-          </a:bodyPr>
-          <a:lstStyle/>
-          <a:p>
-            <a:pPr algn="l"/>
-            <a:r>
-              <a:rPr sz="1600" b="0" i="0">
-                <a:solidFill>
-                  <a:srgbClr val="94A3B8"/>
-                </a:solidFill>
-              </a:rPr>
-              <a:t>Prédiction du prix de vente de maisons · Ames, Iowa</a:t>
-            </a:r>
-          </a:p>
-        </p:txBody>
-      </p:sp>
-      <p:sp>
-        <p:nvSpPr>
-          <p:cNvPr id="10" name="TextBox 9"/>
-          <p:cNvSpPr txBox="1"/>
-          <p:nvPr/>
-        </p:nvSpPr>
-        <p:spPr>
-          <a:xfrm>
-            <a:off x="731520" y="4251960"/>
-            <a:ext cx="9144000" cy="365760"/>
-          </a:xfrm>
-          <a:prstGeom prst="rect">
-            <a:avLst/>
-          </a:prstGeom>
-          <a:noFill/>
-        </p:spPr>
-        <p:txBody>
-          <a:bodyPr wrap="square">
-            <a:spAutoFit/>
-          </a:bodyPr>
-          <a:lstStyle/>
-          <a:p>
-            <a:pPr algn="l"/>
-            <a:r>
-              <a:rPr sz="1200" b="0" i="1">
-                <a:solidFill>
-                  <a:srgbClr val="64748B"/>
-                </a:solidFill>
-              </a:rPr>
-              <a:t>Pipeline End-to-End : EDA → Preprocessing → Feature Engineering → 3 Modèles → Optimisation</a:t>
-            </a:r>
-          </a:p>
-        </p:txBody>
-      </p:sp>
-      <p:sp>
-        <p:nvSpPr>
-          <p:cNvPr id="11" name="Rectangle 10"/>
-          <p:cNvSpPr/>
-          <p:nvPr/>
-        </p:nvSpPr>
-        <p:spPr>
-          <a:xfrm>
-            <a:off x="731520" y="4754880"/>
-            <a:ext cx="4572000" cy="27432"/>
-          </a:xfrm>
-          <a:prstGeom prst="rect">
-            <a:avLst/>
-          </a:prstGeom>
-          <a:solidFill>
-            <a:srgbClr val="2563EB"/>
-          </a:solidFill>
-          <a:ln>
-            <a:noFill/>
-          </a:ln>
-        </p:spPr>
-        <p:style>
-          <a:lnRef idx="1">
-            <a:schemeClr val="accent1"/>
-          </a:lnRef>
-          <a:fillRef idx="3">
-            <a:schemeClr val="accent1"/>
-          </a:fillRef>
-          <a:effectRef idx="2">
-            <a:schemeClr val="accent1"/>
-          </a:effectRef>
-          <a:fontRef idx="minor">
-            <a:schemeClr val="lt1"/>
-          </a:fontRef>
-        </p:style>
-        <p:txBody>
-          <a:bodyPr rtlCol="0" anchor="ctr"/>
-          <a:lstStyle/>
-          <a:p>
-            <a:pPr algn="ctr"/>
-          </a:p>
-        </p:txBody>
-      </p:sp>
-      <p:sp>
-        <p:nvSpPr>
-          <p:cNvPr id="12" name="TextBox 11"/>
-          <p:cNvSpPr txBox="1"/>
-          <p:nvPr/>
-        </p:nvSpPr>
-        <p:spPr>
-          <a:xfrm>
-            <a:off x="731520" y="4937760"/>
-            <a:ext cx="6400800" cy="365760"/>
-          </a:xfrm>
-          <a:prstGeom prst="rect">
-            <a:avLst/>
-          </a:prstGeom>
-          <a:noFill/>
-        </p:spPr>
-        <p:txBody>
-          <a:bodyPr wrap="square">
-            <a:spAutoFit/>
-          </a:bodyPr>
-          <a:lstStyle/>
-          <a:p>
-            <a:pPr algn="l"/>
-            <a:r>
-              <a:rPr sz="1300" b="0" i="0">
-                <a:solidFill>
-                  <a:srgbClr val="64748B"/>
-                </a:solidFill>
-              </a:rPr>
-              <a:t>[Votre Nom] · Machine Learning · [Institution]</a:t>
-            </a:r>
-          </a:p>
-        </p:txBody>
-      </p:sp>
-      <p:sp>
-        <p:nvSpPr>
-          <p:cNvPr id="13" name="Rectangle 12"/>
-          <p:cNvSpPr/>
-          <p:nvPr/>
-        </p:nvSpPr>
-        <p:spPr>
-          <a:xfrm>
-            <a:off x="9144000" y="5029200"/>
+            <a:off x="9144000" y="3474720"/>
             <a:ext cx="2286000" cy="1280160"/>
           </a:xfrm>
           <a:prstGeom prst="rect">
@@ -3561,117 +3600,7 @@
           <a:lstStyle/>
           <a:p>
             <a:pPr algn="ctr"/>
-          </a:p>
-        </p:txBody>
-      </p:sp>
-      <p:sp>
-        <p:nvSpPr>
-          <p:cNvPr id="14" name="TextBox 13"/>
-          <p:cNvSpPr txBox="1"/>
-          <p:nvPr/>
-        </p:nvSpPr>
-        <p:spPr>
-          <a:xfrm>
-            <a:off x="9144000" y="5166360"/>
-            <a:ext cx="2286000" cy="685800"/>
-          </a:xfrm>
-          <a:prstGeom prst="rect">
-            <a:avLst/>
-          </a:prstGeom>
-          <a:noFill/>
-        </p:spPr>
-        <p:txBody>
-          <a:bodyPr wrap="square">
-            <a:spAutoFit/>
-          </a:bodyPr>
-          <a:lstStyle/>
-          <a:p>
-            <a:pPr algn="ctr"/>
-            <a:r>
-              <a:rPr sz="3400" b="1" i="0">
-                <a:solidFill>
-                  <a:srgbClr val="16A34A"/>
-                </a:solidFill>
-              </a:rPr>
-              <a:t>0.905</a:t>
-            </a:r>
-          </a:p>
-        </p:txBody>
-      </p:sp>
-      <p:sp>
-        <p:nvSpPr>
-          <p:cNvPr id="15" name="TextBox 14"/>
-          <p:cNvSpPr txBox="1"/>
-          <p:nvPr/>
-        </p:nvSpPr>
-        <p:spPr>
-          <a:xfrm>
-            <a:off x="9144000" y="5806440"/>
-            <a:ext cx="2286000" cy="411480"/>
-          </a:xfrm>
-          <a:prstGeom prst="rect">
-            <a:avLst/>
-          </a:prstGeom>
-          <a:noFill/>
-        </p:spPr>
-        <p:txBody>
-          <a:bodyPr wrap="square">
-            <a:spAutoFit/>
-          </a:bodyPr>
-          <a:lstStyle/>
-          <a:p>
-            <a:pPr algn="ctr"/>
-            <a:r>
-              <a:rPr sz="1100" b="0" i="0">
-                <a:solidFill>
-                  <a:srgbClr val="94A3B8"/>
-                </a:solidFill>
-              </a:rPr>
-              <a:t>R² Score</a:t>
-            </a:r>
-          </a:p>
-        </p:txBody>
-      </p:sp>
-      <p:sp>
-        <p:nvSpPr>
-          <p:cNvPr id="16" name="Rectangle 15"/>
-          <p:cNvSpPr/>
-          <p:nvPr/>
-        </p:nvSpPr>
-        <p:spPr>
-          <a:xfrm>
-            <a:off x="9144000" y="3474720"/>
-            <a:ext cx="2286000" cy="1280160"/>
-          </a:xfrm>
-          <a:prstGeom prst="rect">
-            <a:avLst/>
-          </a:prstGeom>
-          <a:solidFill>
-            <a:srgbClr val="0F2A50"/>
-          </a:solidFill>
-          <a:ln>
-            <a:noFill/>
-          </a:ln>
-        </p:spPr>
-        <p:style>
-          <a:lnRef idx="1">
-            <a:schemeClr val="accent1"/>
-          </a:lnRef>
-          <a:fillRef idx="3">
-            <a:schemeClr val="accent1"/>
-          </a:fillRef>
-          <a:effectRef idx="2">
-            <a:schemeClr val="accent1"/>
-          </a:effectRef>
-          <a:fontRef idx="minor">
-            <a:schemeClr val="lt1"/>
-          </a:fontRef>
-        </p:style>
-        <p:txBody>
-          <a:bodyPr rtlCol="0" anchor="ctr"/>
-          <a:lstStyle/>
-          <a:p>
-            <a:pPr algn="ctr"/>
+            <a:endParaRPr/>
           </a:p>
         </p:txBody>
       </p:sp>
@@ -3752,7 +3681,7 @@
 </file>
 
 <file path=ppt/slides/slide2.xml><?xml version="1.0" encoding="utf-8"?>
-<p:sld xmlns:a="http://schemas.openxmlformats.org/drawingml/2006/main" xmlns:p="http://schemas.openxmlformats.org/presentationml/2006/main" xmlns:r="http://schemas.openxmlformats.org/officeDocument/2006/relationships">
+<p:sld xmlns:a="http://schemas.openxmlformats.org/drawingml/2006/main" xmlns:r="http://schemas.openxmlformats.org/officeDocument/2006/relationships" xmlns:p="http://schemas.openxmlformats.org/presentationml/2006/main">
   <p:cSld>
     <p:bg>
       <p:bgPr>
@@ -3768,7 +3697,14 @@
         <p:cNvGrpSpPr/>
         <p:nvPr/>
       </p:nvGrpSpPr>
-      <p:grpSpPr/>
+      <p:grpSpPr>
+        <a:xfrm>
+          <a:off x="0" y="0"/>
+          <a:ext cx="0" cy="0"/>
+          <a:chOff x="0" y="0"/>
+          <a:chExt cx="0" cy="0"/>
+        </a:xfrm>
+      </p:grpSpPr>
       <p:sp>
         <p:nvSpPr>
           <p:cNvPr id="2" name="Rectangle 1"/>
@@ -3809,6 +3745,7 @@
           <a:lstStyle/>
           <a:p>
             <a:pPr algn="ctr"/>
+            <a:endParaRPr/>
           </a:p>
         </p:txBody>
       </p:sp>
@@ -3886,6 +3823,7 @@
           <a:lstStyle/>
           <a:p>
             <a:pPr algn="ctr"/>
+            <a:endParaRPr/>
           </a:p>
         </p:txBody>
       </p:sp>
@@ -3929,6 +3867,7 @@
           <a:lstStyle/>
           <a:p>
             <a:pPr algn="ctr"/>
+            <a:endParaRPr/>
           </a:p>
         </p:txBody>
       </p:sp>
@@ -4246,6 +4185,7 @@
           <a:lstStyle/>
           <a:p>
             <a:pPr algn="ctr"/>
+            <a:endParaRPr/>
           </a:p>
         </p:txBody>
       </p:sp>
@@ -4768,7 +4708,7 @@
 </file>
 
 <file path=ppt/slides/slide3.xml><?xml version="1.0" encoding="utf-8"?>
-<p:sld xmlns:a="http://schemas.openxmlformats.org/drawingml/2006/main" xmlns:p="http://schemas.openxmlformats.org/presentationml/2006/main" xmlns:r="http://schemas.openxmlformats.org/officeDocument/2006/relationships">
+<p:sld xmlns:a="http://schemas.openxmlformats.org/drawingml/2006/main" xmlns:r="http://schemas.openxmlformats.org/officeDocument/2006/relationships" xmlns:p="http://schemas.openxmlformats.org/presentationml/2006/main">
   <p:cSld>
     <p:bg>
       <p:bgPr>
@@ -4784,7 +4724,14 @@
         <p:cNvGrpSpPr/>
         <p:nvPr/>
       </p:nvGrpSpPr>
-      <p:grpSpPr/>
+      <p:grpSpPr>
+        <a:xfrm>
+          <a:off x="0" y="0"/>
+          <a:ext cx="0" cy="0"/>
+          <a:chOff x="0" y="0"/>
+          <a:chExt cx="0" cy="0"/>
+        </a:xfrm>
+      </p:grpSpPr>
       <p:sp>
         <p:nvSpPr>
           <p:cNvPr id="2" name="Rectangle 1"/>
@@ -4825,6 +4772,7 @@
           <a:lstStyle/>
           <a:p>
             <a:pPr algn="ctr"/>
+            <a:endParaRPr/>
           </a:p>
         </p:txBody>
       </p:sp>
@@ -4902,6 +4850,7 @@
           <a:lstStyle/>
           <a:p>
             <a:pPr algn="ctr"/>
+            <a:endParaRPr/>
           </a:p>
         </p:txBody>
       </p:sp>
@@ -4945,6 +4894,7 @@
           <a:lstStyle/>
           <a:p>
             <a:pPr algn="ctr"/>
+            <a:endParaRPr/>
           </a:p>
         </p:txBody>
       </p:sp>
@@ -4988,6 +4938,7 @@
           <a:lstStyle/>
           <a:p>
             <a:pPr algn="ctr"/>
+            <a:endParaRPr/>
           </a:p>
         </p:txBody>
       </p:sp>
@@ -5133,6 +5084,7 @@
           <a:lstStyle/>
           <a:p>
             <a:pPr algn="ctr"/>
+            <a:endParaRPr/>
           </a:p>
         </p:txBody>
       </p:sp>
@@ -5176,6 +5128,7 @@
           <a:lstStyle/>
           <a:p>
             <a:pPr algn="ctr"/>
+            <a:endParaRPr/>
           </a:p>
         </p:txBody>
       </p:sp>
@@ -5321,6 +5274,7 @@
           <a:lstStyle/>
           <a:p>
             <a:pPr algn="ctr"/>
+            <a:endParaRPr/>
           </a:p>
         </p:txBody>
       </p:sp>
@@ -5364,6 +5318,7 @@
           <a:lstStyle/>
           <a:p>
             <a:pPr algn="ctr"/>
+            <a:endParaRPr/>
           </a:p>
         </p:txBody>
       </p:sp>
@@ -5509,6 +5464,7 @@
           <a:lstStyle/>
           <a:p>
             <a:pPr algn="ctr"/>
+            <a:endParaRPr/>
           </a:p>
         </p:txBody>
       </p:sp>
@@ -5552,6 +5508,7 @@
           <a:lstStyle/>
           <a:p>
             <a:pPr algn="ctr"/>
+            <a:endParaRPr/>
           </a:p>
         </p:txBody>
       </p:sp>
@@ -5697,6 +5654,7 @@
           <a:lstStyle/>
           <a:p>
             <a:pPr algn="ctr"/>
+            <a:endParaRPr/>
           </a:p>
         </p:txBody>
       </p:sp>
@@ -5740,6 +5698,7 @@
           <a:lstStyle/>
           <a:p>
             <a:pPr algn="ctr"/>
+            <a:endParaRPr/>
           </a:p>
         </p:txBody>
       </p:sp>
@@ -5885,6 +5844,7 @@
           <a:lstStyle/>
           <a:p>
             <a:pPr algn="ctr"/>
+            <a:endParaRPr/>
           </a:p>
         </p:txBody>
       </p:sp>
@@ -5928,6 +5888,7 @@
           <a:lstStyle/>
           <a:p>
             <a:pPr algn="ctr"/>
+            <a:endParaRPr/>
           </a:p>
         </p:txBody>
       </p:sp>
@@ -5989,13 +5950,18 @@
           <a:p>
             <a:pPr algn="l"/>
             <a:r>
-              <a:rPr sz="1400" b="1" i="0">
+              <a:rPr sz="1400" b="1" i="0" dirty="0" err="1">
                 <a:solidFill>
                   <a:srgbClr val="FFFFFF"/>
                 </a:solidFill>
               </a:rPr>
               <a:t>Optimisation</a:t>
             </a:r>
+            <a:endParaRPr sz="1400" b="1" i="0" dirty="0">
+              <a:solidFill>
+                <a:srgbClr val="FFFFFF"/>
+              </a:solidFill>
+            </a:endParaRPr>
           </a:p>
         </p:txBody>
       </p:sp>
@@ -6076,7 +6042,7 @@
 </file>
 
 <file path=ppt/slides/slide4.xml><?xml version="1.0" encoding="utf-8"?>
-<p:sld xmlns:a="http://schemas.openxmlformats.org/drawingml/2006/main" xmlns:p="http://schemas.openxmlformats.org/presentationml/2006/main" xmlns:r="http://schemas.openxmlformats.org/officeDocument/2006/relationships">
+<p:sld xmlns:a="http://schemas.openxmlformats.org/drawingml/2006/main" xmlns:r="http://schemas.openxmlformats.org/officeDocument/2006/relationships" xmlns:p="http://schemas.openxmlformats.org/presentationml/2006/main">
   <p:cSld>
     <p:bg>
       <p:bgPr>
@@ -6092,7 +6058,14 @@
         <p:cNvGrpSpPr/>
         <p:nvPr/>
       </p:nvGrpSpPr>
-      <p:grpSpPr/>
+      <p:grpSpPr>
+        <a:xfrm>
+          <a:off x="0" y="0"/>
+          <a:ext cx="0" cy="0"/>
+          <a:chOff x="0" y="0"/>
+          <a:chExt cx="0" cy="0"/>
+        </a:xfrm>
+      </p:grpSpPr>
       <p:sp>
         <p:nvSpPr>
           <p:cNvPr id="2" name="Rectangle 1"/>
@@ -6133,6 +6106,7 @@
           <a:lstStyle/>
           <a:p>
             <a:pPr algn="ctr"/>
+            <a:endParaRPr/>
           </a:p>
         </p:txBody>
       </p:sp>
@@ -6244,6 +6218,7 @@
           <a:lstStyle/>
           <a:p>
             <a:pPr algn="ctr"/>
+            <a:endParaRPr/>
           </a:p>
         </p:txBody>
       </p:sp>
@@ -6287,6 +6262,7 @@
           <a:lstStyle/>
           <a:p>
             <a:pPr algn="ctr"/>
+            <a:endParaRPr/>
           </a:p>
         </p:txBody>
       </p:sp>
@@ -6364,6 +6340,7 @@
           <a:lstStyle/>
           <a:p>
             <a:pPr algn="ctr"/>
+            <a:endParaRPr/>
           </a:p>
         </p:txBody>
       </p:sp>
@@ -6441,6 +6418,7 @@
           <a:lstStyle/>
           <a:p>
             <a:pPr algn="ctr"/>
+            <a:endParaRPr/>
           </a:p>
         </p:txBody>
       </p:sp>
@@ -6518,6 +6496,7 @@
           <a:lstStyle/>
           <a:p>
             <a:pPr algn="ctr"/>
+            <a:endParaRPr/>
           </a:p>
         </p:txBody>
       </p:sp>
@@ -6595,6 +6574,7 @@
           <a:lstStyle/>
           <a:p>
             <a:pPr algn="ctr"/>
+            <a:endParaRPr/>
           </a:p>
         </p:txBody>
       </p:sp>
@@ -6774,6 +6754,7 @@
           <a:lstStyle/>
           <a:p>
             <a:pPr algn="ctr"/>
+            <a:endParaRPr/>
           </a:p>
         </p:txBody>
       </p:sp>
@@ -6953,6 +6934,7 @@
           <a:lstStyle/>
           <a:p>
             <a:pPr algn="ctr"/>
+            <a:endParaRPr/>
           </a:p>
         </p:txBody>
       </p:sp>
@@ -7132,6 +7114,7 @@
           <a:lstStyle/>
           <a:p>
             <a:pPr algn="ctr"/>
+            <a:endParaRPr/>
           </a:p>
         </p:txBody>
       </p:sp>
@@ -7311,6 +7294,7 @@
           <a:lstStyle/>
           <a:p>
             <a:pPr algn="ctr"/>
+            <a:endParaRPr/>
           </a:p>
         </p:txBody>
       </p:sp>
@@ -7490,6 +7474,7 @@
           <a:lstStyle/>
           <a:p>
             <a:pPr algn="ctr"/>
+            <a:endParaRPr/>
           </a:p>
         </p:txBody>
       </p:sp>
@@ -7669,6 +7654,7 @@
           <a:lstStyle/>
           <a:p>
             <a:pPr algn="ctr"/>
+            <a:endParaRPr/>
           </a:p>
         </p:txBody>
       </p:sp>
@@ -7848,6 +7834,7 @@
           <a:lstStyle/>
           <a:p>
             <a:pPr algn="ctr"/>
+            <a:endParaRPr/>
           </a:p>
         </p:txBody>
       </p:sp>
@@ -8027,6 +8014,7 @@
           <a:lstStyle/>
           <a:p>
             <a:pPr algn="ctr"/>
+            <a:endParaRPr/>
           </a:p>
         </p:txBody>
       </p:sp>
@@ -8206,6 +8194,7 @@
           <a:lstStyle/>
           <a:p>
             <a:pPr algn="ctr"/>
+            <a:endParaRPr/>
           </a:p>
         </p:txBody>
       </p:sp>
@@ -8385,6 +8374,7 @@
           <a:lstStyle/>
           <a:p>
             <a:pPr algn="ctr"/>
+            <a:endParaRPr/>
           </a:p>
         </p:txBody>
       </p:sp>
@@ -8533,7 +8523,7 @@
 </file>
 
 <file path=ppt/slides/slide5.xml><?xml version="1.0" encoding="utf-8"?>
-<p:sld xmlns:a="http://schemas.openxmlformats.org/drawingml/2006/main" xmlns:p="http://schemas.openxmlformats.org/presentationml/2006/main" xmlns:r="http://schemas.openxmlformats.org/officeDocument/2006/relationships">
+<p:sld xmlns:a="http://schemas.openxmlformats.org/drawingml/2006/main" xmlns:r="http://schemas.openxmlformats.org/officeDocument/2006/relationships" xmlns:p="http://schemas.openxmlformats.org/presentationml/2006/main">
   <p:cSld>
     <p:bg>
       <p:bgPr>
@@ -8549,7 +8539,14 @@
         <p:cNvGrpSpPr/>
         <p:nvPr/>
       </p:nvGrpSpPr>
-      <p:grpSpPr/>
+      <p:grpSpPr>
+        <a:xfrm>
+          <a:off x="0" y="0"/>
+          <a:ext cx="0" cy="0"/>
+          <a:chOff x="0" y="0"/>
+          <a:chExt cx="0" cy="0"/>
+        </a:xfrm>
+      </p:grpSpPr>
       <p:sp>
         <p:nvSpPr>
           <p:cNvPr id="2" name="Rectangle 1"/>
@@ -8590,6 +8587,7 @@
           <a:lstStyle/>
           <a:p>
             <a:pPr algn="ctr"/>
+            <a:endParaRPr/>
           </a:p>
         </p:txBody>
       </p:sp>
@@ -8701,6 +8699,7 @@
           <a:lstStyle/>
           <a:p>
             <a:pPr algn="ctr"/>
+            <a:endParaRPr/>
           </a:p>
         </p:txBody>
       </p:sp>
@@ -8744,6 +8743,7 @@
           <a:lstStyle/>
           <a:p>
             <a:pPr algn="ctr"/>
+            <a:endParaRPr/>
           </a:p>
         </p:txBody>
       </p:sp>
@@ -8821,6 +8821,7 @@
           <a:lstStyle/>
           <a:p>
             <a:pPr algn="ctr"/>
+            <a:endParaRPr/>
           </a:p>
         </p:txBody>
       </p:sp>
@@ -8898,6 +8899,7 @@
           <a:lstStyle/>
           <a:p>
             <a:pPr algn="ctr"/>
+            <a:endParaRPr/>
           </a:p>
         </p:txBody>
       </p:sp>
@@ -8975,6 +8977,7 @@
           <a:lstStyle/>
           <a:p>
             <a:pPr algn="ctr"/>
+            <a:endParaRPr/>
           </a:p>
         </p:txBody>
       </p:sp>
@@ -9052,6 +9055,7 @@
           <a:lstStyle/>
           <a:p>
             <a:pPr algn="ctr"/>
+            <a:endParaRPr/>
           </a:p>
         </p:txBody>
       </p:sp>
@@ -9129,6 +9133,7 @@
           <a:lstStyle/>
           <a:p>
             <a:pPr algn="ctr"/>
+            <a:endParaRPr/>
           </a:p>
         </p:txBody>
       </p:sp>
@@ -9172,6 +9177,7 @@
           <a:lstStyle/>
           <a:p>
             <a:pPr algn="ctr"/>
+            <a:endParaRPr/>
           </a:p>
         </p:txBody>
       </p:sp>
@@ -9419,6 +9425,7 @@
           <a:lstStyle/>
           <a:p>
             <a:pPr algn="ctr"/>
+            <a:endParaRPr/>
           </a:p>
         </p:txBody>
       </p:sp>
@@ -9632,6 +9639,7 @@
           <a:lstStyle/>
           <a:p>
             <a:pPr algn="ctr"/>
+            <a:endParaRPr/>
           </a:p>
         </p:txBody>
       </p:sp>
@@ -9845,6 +9853,7 @@
           <a:lstStyle/>
           <a:p>
             <a:pPr algn="ctr"/>
+            <a:endParaRPr/>
           </a:p>
         </p:txBody>
       </p:sp>
@@ -9888,6 +9897,7 @@
           <a:lstStyle/>
           <a:p>
             <a:pPr algn="ctr"/>
+            <a:endParaRPr/>
           </a:p>
         </p:txBody>
       </p:sp>
@@ -10138,7 +10148,7 @@
 </file>
 
 <file path=ppt/slides/slide6.xml><?xml version="1.0" encoding="utf-8"?>
-<p:sld xmlns:a="http://schemas.openxmlformats.org/drawingml/2006/main" xmlns:p="http://schemas.openxmlformats.org/presentationml/2006/main" xmlns:r="http://schemas.openxmlformats.org/officeDocument/2006/relationships">
+<p:sld xmlns:a="http://schemas.openxmlformats.org/drawingml/2006/main" xmlns:r="http://schemas.openxmlformats.org/officeDocument/2006/relationships" xmlns:p="http://schemas.openxmlformats.org/presentationml/2006/main">
   <p:cSld>
     <p:bg>
       <p:bgPr>
@@ -10154,7 +10164,14 @@
         <p:cNvGrpSpPr/>
         <p:nvPr/>
       </p:nvGrpSpPr>
-      <p:grpSpPr/>
+      <p:grpSpPr>
+        <a:xfrm>
+          <a:off x="0" y="0"/>
+          <a:ext cx="0" cy="0"/>
+          <a:chOff x="0" y="0"/>
+          <a:chExt cx="0" cy="0"/>
+        </a:xfrm>
+      </p:grpSpPr>
       <p:sp>
         <p:nvSpPr>
           <p:cNvPr id="2" name="Rectangle 1"/>
@@ -10195,6 +10212,7 @@
           <a:lstStyle/>
           <a:p>
             <a:pPr algn="ctr"/>
+            <a:endParaRPr/>
           </a:p>
         </p:txBody>
       </p:sp>
@@ -10306,6 +10324,7 @@
           <a:lstStyle/>
           <a:p>
             <a:pPr algn="ctr"/>
+            <a:endParaRPr/>
           </a:p>
         </p:txBody>
       </p:sp>
@@ -10349,6 +10368,7 @@
           <a:lstStyle/>
           <a:p>
             <a:pPr algn="ctr"/>
+            <a:endParaRPr/>
           </a:p>
         </p:txBody>
       </p:sp>
@@ -10460,6 +10480,7 @@
           <a:lstStyle/>
           <a:p>
             <a:pPr algn="ctr"/>
+            <a:endParaRPr/>
           </a:p>
         </p:txBody>
       </p:sp>
@@ -10571,6 +10592,7 @@
           <a:lstStyle/>
           <a:p>
             <a:pPr algn="ctr"/>
+            <a:endParaRPr/>
           </a:p>
         </p:txBody>
       </p:sp>
@@ -10682,6 +10704,7 @@
           <a:lstStyle/>
           <a:p>
             <a:pPr algn="ctr"/>
+            <a:endParaRPr/>
           </a:p>
         </p:txBody>
       </p:sp>
@@ -10793,6 +10816,7 @@
           <a:lstStyle/>
           <a:p>
             <a:pPr algn="ctr"/>
+            <a:endParaRPr/>
           </a:p>
         </p:txBody>
       </p:sp>
@@ -10904,6 +10928,7 @@
           <a:lstStyle/>
           <a:p>
             <a:pPr algn="ctr"/>
+            <a:endParaRPr/>
           </a:p>
         </p:txBody>
       </p:sp>
@@ -11015,6 +11040,7 @@
           <a:lstStyle/>
           <a:p>
             <a:pPr algn="ctr"/>
+            <a:endParaRPr/>
           </a:p>
         </p:txBody>
       </p:sp>
@@ -11126,6 +11152,7 @@
           <a:lstStyle/>
           <a:p>
             <a:pPr algn="ctr"/>
+            <a:endParaRPr/>
           </a:p>
         </p:txBody>
       </p:sp>
@@ -11237,6 +11264,7 @@
           <a:lstStyle/>
           <a:p>
             <a:pPr algn="ctr"/>
+            <a:endParaRPr/>
           </a:p>
         </p:txBody>
       </p:sp>
@@ -11348,6 +11376,7 @@
           <a:lstStyle/>
           <a:p>
             <a:pPr algn="ctr"/>
+            <a:endParaRPr/>
           </a:p>
         </p:txBody>
       </p:sp>
@@ -11459,6 +11488,7 @@
           <a:lstStyle/>
           <a:p>
             <a:pPr algn="ctr"/>
+            <a:endParaRPr/>
           </a:p>
         </p:txBody>
       </p:sp>
@@ -11536,6 +11566,7 @@
           <a:lstStyle/>
           <a:p>
             <a:pPr algn="ctr"/>
+            <a:endParaRPr/>
           </a:p>
         </p:txBody>
       </p:sp>
@@ -11613,6 +11644,7 @@
           <a:lstStyle/>
           <a:p>
             <a:pPr algn="ctr"/>
+            <a:endParaRPr/>
           </a:p>
         </p:txBody>
       </p:sp>
@@ -11724,6 +11756,7 @@
           <a:lstStyle/>
           <a:p>
             <a:pPr algn="ctr"/>
+            <a:endParaRPr/>
           </a:p>
         </p:txBody>
       </p:sp>
@@ -11835,6 +11868,7 @@
           <a:lstStyle/>
           <a:p>
             <a:pPr algn="ctr"/>
+            <a:endParaRPr/>
           </a:p>
         </p:txBody>
       </p:sp>
@@ -11946,6 +11980,7 @@
           <a:lstStyle/>
           <a:p>
             <a:pPr algn="ctr"/>
+            <a:endParaRPr/>
           </a:p>
         </p:txBody>
       </p:sp>
@@ -12057,6 +12092,7 @@
           <a:lstStyle/>
           <a:p>
             <a:pPr algn="ctr"/>
+            <a:endParaRPr/>
           </a:p>
         </p:txBody>
       </p:sp>
@@ -12168,6 +12204,7 @@
           <a:lstStyle/>
           <a:p>
             <a:pPr algn="ctr"/>
+            <a:endParaRPr/>
           </a:p>
         </p:txBody>
       </p:sp>
@@ -12279,6 +12316,7 @@
           <a:lstStyle/>
           <a:p>
             <a:pPr algn="ctr"/>
+            <a:endParaRPr/>
           </a:p>
         </p:txBody>
       </p:sp>
@@ -12325,7 +12363,7 @@
 </file>
 
 <file path=ppt/slides/slide7.xml><?xml version="1.0" encoding="utf-8"?>
-<p:sld xmlns:a="http://schemas.openxmlformats.org/drawingml/2006/main" xmlns:p="http://schemas.openxmlformats.org/presentationml/2006/main" xmlns:r="http://schemas.openxmlformats.org/officeDocument/2006/relationships">
+<p:sld xmlns:a="http://schemas.openxmlformats.org/drawingml/2006/main" xmlns:r="http://schemas.openxmlformats.org/officeDocument/2006/relationships" xmlns:p="http://schemas.openxmlformats.org/presentationml/2006/main">
   <p:cSld>
     <p:bg>
       <p:bgPr>
@@ -12341,7 +12379,14 @@
         <p:cNvGrpSpPr/>
         <p:nvPr/>
       </p:nvGrpSpPr>
-      <p:grpSpPr/>
+      <p:grpSpPr>
+        <a:xfrm>
+          <a:off x="0" y="0"/>
+          <a:ext cx="0" cy="0"/>
+          <a:chOff x="0" y="0"/>
+          <a:chExt cx="0" cy="0"/>
+        </a:xfrm>
+      </p:grpSpPr>
       <p:sp>
         <p:nvSpPr>
           <p:cNvPr id="2" name="Rectangle 1"/>
@@ -12382,21 +12427,301 @@
           <a:lstStyle/>
           <a:p>
             <a:pPr algn="ctr"/>
-          </a:p>
-        </p:txBody>
-      </p:sp>
-      <p:sp>
-        <p:nvSpPr>
-          <p:cNvPr id="3" name="Oval 2"/>
+            <a:endParaRPr/>
+          </a:p>
+        </p:txBody>
+      </p:sp>
+      <p:sp>
+        <p:nvSpPr>
+          <p:cNvPr id="4" name="Oval 3"/>
           <p:cNvSpPr/>
           <p:nvPr/>
         </p:nvSpPr>
         <p:spPr>
           <a:xfrm>
-            <a:off x="9144000" y="-457200"/>
-            <a:ext cx="4114800" cy="4114800"/>
+            <a:off x="8686800" y="4572000"/>
+            <a:ext cx="2743200" cy="2743200"/>
           </a:xfrm>
           <a:prstGeom prst="ellipse">
+            <a:avLst/>
+          </a:prstGeom>
+          <a:solidFill>
+            <a:srgbClr val="052E16"/>
+          </a:solidFill>
+          <a:ln>
+            <a:noFill/>
+          </a:ln>
+        </p:spPr>
+        <p:style>
+          <a:lnRef idx="1">
+            <a:schemeClr val="accent1"/>
+          </a:lnRef>
+          <a:fillRef idx="3">
+            <a:schemeClr val="accent1"/>
+          </a:fillRef>
+          <a:effectRef idx="2">
+            <a:schemeClr val="accent1"/>
+          </a:effectRef>
+          <a:fontRef idx="minor">
+            <a:schemeClr val="lt1"/>
+          </a:fontRef>
+        </p:style>
+        <p:txBody>
+          <a:bodyPr rtlCol="0" anchor="ctr"/>
+          <a:lstStyle/>
+          <a:p>
+            <a:pPr algn="ctr"/>
+            <a:endParaRPr/>
+          </a:p>
+        </p:txBody>
+      </p:sp>
+      <p:sp>
+        <p:nvSpPr>
+          <p:cNvPr id="5" name="TextBox 4"/>
+          <p:cNvSpPr txBox="1"/>
+          <p:nvPr/>
+        </p:nvSpPr>
+        <p:spPr>
+          <a:xfrm>
+            <a:off x="731520" y="320040"/>
+            <a:ext cx="9144000" cy="640080"/>
+          </a:xfrm>
+          <a:prstGeom prst="rect">
+            <a:avLst/>
+          </a:prstGeom>
+          <a:noFill/>
+        </p:spPr>
+        <p:txBody>
+          <a:bodyPr wrap="square">
+            <a:spAutoFit/>
+          </a:bodyPr>
+          <a:lstStyle/>
+          <a:p>
+            <a:pPr algn="l"/>
+            <a:r>
+              <a:rPr sz="3200" b="1" i="0">
+                <a:solidFill>
+                  <a:srgbClr val="FFFFFF"/>
+                </a:solidFill>
+              </a:rPr>
+              <a:t>Conclusion &amp; Perspectives</a:t>
+            </a:r>
+          </a:p>
+        </p:txBody>
+      </p:sp>
+      <p:sp>
+        <p:nvSpPr>
+          <p:cNvPr id="6" name="Rectangle 5"/>
+          <p:cNvSpPr/>
+          <p:nvPr/>
+        </p:nvSpPr>
+        <p:spPr>
+          <a:xfrm>
+            <a:off x="731520" y="960120"/>
+            <a:ext cx="4572000" cy="36576"/>
+          </a:xfrm>
+          <a:prstGeom prst="rect">
+            <a:avLst/>
+          </a:prstGeom>
+          <a:solidFill>
+            <a:srgbClr val="2563EB"/>
+          </a:solidFill>
+          <a:ln>
+            <a:noFill/>
+          </a:ln>
+        </p:spPr>
+        <p:style>
+          <a:lnRef idx="1">
+            <a:schemeClr val="accent1"/>
+          </a:lnRef>
+          <a:fillRef idx="3">
+            <a:schemeClr val="accent1"/>
+          </a:fillRef>
+          <a:effectRef idx="2">
+            <a:schemeClr val="accent1"/>
+          </a:effectRef>
+          <a:fontRef idx="minor">
+            <a:schemeClr val="lt1"/>
+          </a:fontRef>
+        </p:style>
+        <p:txBody>
+          <a:bodyPr rtlCol="0" anchor="ctr"/>
+          <a:lstStyle/>
+          <a:p>
+            <a:pPr algn="ctr"/>
+            <a:endParaRPr/>
+          </a:p>
+        </p:txBody>
+      </p:sp>
+      <p:sp>
+        <p:nvSpPr>
+          <p:cNvPr id="7" name="Rectangle 6"/>
+          <p:cNvSpPr/>
+          <p:nvPr/>
+        </p:nvSpPr>
+        <p:spPr>
+          <a:xfrm>
+            <a:off x="685800" y="1097280"/>
+            <a:ext cx="5577840" cy="1920240"/>
+          </a:xfrm>
+          <a:prstGeom prst="rect">
+            <a:avLst/>
+          </a:prstGeom>
+          <a:solidFill>
+            <a:srgbClr val="052E16"/>
+          </a:solidFill>
+          <a:ln>
+            <a:noFill/>
+          </a:ln>
+        </p:spPr>
+        <p:style>
+          <a:lnRef idx="1">
+            <a:schemeClr val="accent1"/>
+          </a:lnRef>
+          <a:fillRef idx="3">
+            <a:schemeClr val="accent1"/>
+          </a:fillRef>
+          <a:effectRef idx="2">
+            <a:schemeClr val="accent1"/>
+          </a:effectRef>
+          <a:fontRef idx="minor">
+            <a:schemeClr val="lt1"/>
+          </a:fontRef>
+        </p:style>
+        <p:txBody>
+          <a:bodyPr rtlCol="0" anchor="ctr"/>
+          <a:lstStyle/>
+          <a:p>
+            <a:pPr algn="ctr"/>
+            <a:endParaRPr/>
+          </a:p>
+        </p:txBody>
+      </p:sp>
+      <p:sp>
+        <p:nvSpPr>
+          <p:cNvPr id="8" name="Rectangle 7"/>
+          <p:cNvSpPr/>
+          <p:nvPr/>
+        </p:nvSpPr>
+        <p:spPr>
+          <a:xfrm>
+            <a:off x="685800" y="1097280"/>
+            <a:ext cx="54864" cy="1920240"/>
+          </a:xfrm>
+          <a:prstGeom prst="rect">
+            <a:avLst/>
+          </a:prstGeom>
+          <a:solidFill>
+            <a:srgbClr val="16A34A"/>
+          </a:solidFill>
+          <a:ln>
+            <a:noFill/>
+          </a:ln>
+        </p:spPr>
+        <p:style>
+          <a:lnRef idx="1">
+            <a:schemeClr val="accent1"/>
+          </a:lnRef>
+          <a:fillRef idx="3">
+            <a:schemeClr val="accent1"/>
+          </a:fillRef>
+          <a:effectRef idx="2">
+            <a:schemeClr val="accent1"/>
+          </a:effectRef>
+          <a:fontRef idx="minor">
+            <a:schemeClr val="lt1"/>
+          </a:fontRef>
+        </p:style>
+        <p:txBody>
+          <a:bodyPr rtlCol="0" anchor="ctr"/>
+          <a:lstStyle/>
+          <a:p>
+            <a:pPr algn="ctr"/>
+            <a:endParaRPr/>
+          </a:p>
+        </p:txBody>
+      </p:sp>
+      <p:sp>
+        <p:nvSpPr>
+          <p:cNvPr id="9" name="TextBox 8"/>
+          <p:cNvSpPr txBox="1"/>
+          <p:nvPr/>
+        </p:nvSpPr>
+        <p:spPr>
+          <a:xfrm>
+            <a:off x="914400" y="1188720"/>
+            <a:ext cx="5212080" cy="457200"/>
+          </a:xfrm>
+          <a:prstGeom prst="rect">
+            <a:avLst/>
+          </a:prstGeom>
+          <a:noFill/>
+        </p:spPr>
+        <p:txBody>
+          <a:bodyPr wrap="square">
+            <a:spAutoFit/>
+          </a:bodyPr>
+          <a:lstStyle/>
+          <a:p>
+            <a:pPr algn="l"/>
+            <a:r>
+              <a:rPr sz="1600" b="1" i="0">
+                <a:solidFill>
+                  <a:srgbClr val="16A34A"/>
+                </a:solidFill>
+              </a:rPr>
+              <a:t>✅ Objectif atteint — R² = 0.905</a:t>
+            </a:r>
+          </a:p>
+        </p:txBody>
+      </p:sp>
+      <p:sp>
+        <p:nvSpPr>
+          <p:cNvPr id="10" name="TextBox 9"/>
+          <p:cNvSpPr txBox="1"/>
+          <p:nvPr/>
+        </p:nvSpPr>
+        <p:spPr>
+          <a:xfrm>
+            <a:off x="914400" y="1600200"/>
+            <a:ext cx="5212080" cy="777240"/>
+          </a:xfrm>
+          <a:prstGeom prst="rect">
+            <a:avLst/>
+          </a:prstGeom>
+          <a:noFill/>
+        </p:spPr>
+        <p:txBody>
+          <a:bodyPr wrap="square">
+            <a:spAutoFit/>
+          </a:bodyPr>
+          <a:lstStyle/>
+          <a:p>
+            <a:pPr algn="l"/>
+            <a:r>
+              <a:rPr sz="1200" b="0" i="0">
+                <a:solidFill>
+                  <a:srgbClr val="CBD5E1"/>
+                </a:solidFill>
+              </a:rPr>
+              <a:t>Gradient Boosting optimisé prédit les prix
+avec une précision de 90.5% (±$12K sur $163K médian)</a:t>
+            </a:r>
+          </a:p>
+        </p:txBody>
+      </p:sp>
+      <p:sp>
+        <p:nvSpPr>
+          <p:cNvPr id="11" name="Rectangle 10"/>
+          <p:cNvSpPr/>
+          <p:nvPr/>
+        </p:nvSpPr>
+        <p:spPr>
+          <a:xfrm>
+            <a:off x="685800" y="3154680"/>
+            <a:ext cx="5577840" cy="3337560"/>
+          </a:xfrm>
+          <a:prstGeom prst="rect">
             <a:avLst/>
           </a:prstGeom>
           <a:solidFill>
@@ -12425,25 +12750,400 @@
           <a:lstStyle/>
           <a:p>
             <a:pPr algn="ctr"/>
-          </a:p>
-        </p:txBody>
-      </p:sp>
-      <p:sp>
-        <p:nvSpPr>
-          <p:cNvPr id="4" name="Oval 3"/>
+            <a:endParaRPr/>
+          </a:p>
+        </p:txBody>
+      </p:sp>
+      <p:sp>
+        <p:nvSpPr>
+          <p:cNvPr id="12" name="TextBox 11"/>
+          <p:cNvSpPr txBox="1"/>
+          <p:nvPr/>
+        </p:nvSpPr>
+        <p:spPr>
+          <a:xfrm>
+            <a:off x="914400" y="3291840"/>
+            <a:ext cx="5212080" cy="365760"/>
+          </a:xfrm>
+          <a:prstGeom prst="rect">
+            <a:avLst/>
+          </a:prstGeom>
+          <a:noFill/>
+        </p:spPr>
+        <p:txBody>
+          <a:bodyPr wrap="square">
+            <a:spAutoFit/>
+          </a:bodyPr>
+          <a:lstStyle/>
+          <a:p>
+            <a:pPr algn="l"/>
+            <a:r>
+              <a:rPr sz="1400" b="1" i="0">
+                <a:solidFill>
+                  <a:srgbClr val="FFFFFF"/>
+                </a:solidFill>
+              </a:rPr>
+              <a:t>📊 Bilan des Modèles</a:t>
+            </a:r>
+          </a:p>
+        </p:txBody>
+      </p:sp>
+      <p:sp>
+        <p:nvSpPr>
+          <p:cNvPr id="13" name="TextBox 12"/>
+          <p:cNvSpPr txBox="1"/>
+          <p:nvPr/>
+        </p:nvSpPr>
+        <p:spPr>
+          <a:xfrm>
+            <a:off x="914400" y="3703320"/>
+            <a:ext cx="2286000" cy="411480"/>
+          </a:xfrm>
+          <a:prstGeom prst="rect">
+            <a:avLst/>
+          </a:prstGeom>
+          <a:noFill/>
+        </p:spPr>
+        <p:txBody>
+          <a:bodyPr wrap="square">
+            <a:spAutoFit/>
+          </a:bodyPr>
+          <a:lstStyle/>
+          <a:p>
+            <a:pPr algn="l"/>
+            <a:r>
+              <a:rPr sz="1100" b="1" i="0">
+                <a:solidFill>
+                  <a:srgbClr val="16A34A"/>
+                </a:solidFill>
+              </a:rPr>
+              <a:t>✅ Gradient Boosting</a:t>
+            </a:r>
+          </a:p>
+        </p:txBody>
+      </p:sp>
+      <p:sp>
+        <p:nvSpPr>
+          <p:cNvPr id="14" name="TextBox 13"/>
+          <p:cNvSpPr txBox="1"/>
+          <p:nvPr/>
+        </p:nvSpPr>
+        <p:spPr>
+          <a:xfrm>
+            <a:off x="3291840" y="3703320"/>
+            <a:ext cx="2834640" cy="411480"/>
+          </a:xfrm>
+          <a:prstGeom prst="rect">
+            <a:avLst/>
+          </a:prstGeom>
+          <a:noFill/>
+        </p:spPr>
+        <p:txBody>
+          <a:bodyPr wrap="square">
+            <a:spAutoFit/>
+          </a:bodyPr>
+          <a:lstStyle/>
+          <a:p>
+            <a:pPr algn="l"/>
+            <a:r>
+              <a:rPr sz="1100" b="0" i="1">
+                <a:solidFill>
+                  <a:srgbClr val="64748B"/>
+                </a:solidFill>
+              </a:rPr>
+              <a:t>R²=0.905 · Meilleur modèle · Retenu</a:t>
+            </a:r>
+          </a:p>
+        </p:txBody>
+      </p:sp>
+      <p:sp>
+        <p:nvSpPr>
+          <p:cNvPr id="15" name="TextBox 14"/>
+          <p:cNvSpPr txBox="1"/>
+          <p:nvPr/>
+        </p:nvSpPr>
+        <p:spPr>
+          <a:xfrm>
+            <a:off x="914400" y="4206240"/>
+            <a:ext cx="2286000" cy="411480"/>
+          </a:xfrm>
+          <a:prstGeom prst="rect">
+            <a:avLst/>
+          </a:prstGeom>
+          <a:noFill/>
+        </p:spPr>
+        <p:txBody>
+          <a:bodyPr wrap="square">
+            <a:spAutoFit/>
+          </a:bodyPr>
+          <a:lstStyle/>
+          <a:p>
+            <a:pPr algn="l"/>
+            <a:r>
+              <a:rPr sz="1100" b="1" i="0">
+                <a:solidFill>
+                  <a:srgbClr val="3B82F6"/>
+                </a:solidFill>
+              </a:rPr>
+              <a:t>✅ Random Forest</a:t>
+            </a:r>
+          </a:p>
+        </p:txBody>
+      </p:sp>
+      <p:sp>
+        <p:nvSpPr>
+          <p:cNvPr id="16" name="TextBox 15"/>
+          <p:cNvSpPr txBox="1"/>
+          <p:nvPr/>
+        </p:nvSpPr>
+        <p:spPr>
+          <a:xfrm>
+            <a:off x="3291840" y="4206240"/>
+            <a:ext cx="2834640" cy="411480"/>
+          </a:xfrm>
+          <a:prstGeom prst="rect">
+            <a:avLst/>
+          </a:prstGeom>
+          <a:noFill/>
+        </p:spPr>
+        <p:txBody>
+          <a:bodyPr wrap="square">
+            <a:spAutoFit/>
+          </a:bodyPr>
+          <a:lstStyle/>
+          <a:p>
+            <a:pPr algn="l"/>
+            <a:r>
+              <a:rPr sz="1100" b="0" i="1">
+                <a:solidFill>
+                  <a:srgbClr val="64748B"/>
+                </a:solidFill>
+              </a:rPr>
+              <a:t>R²=0.872 · Robuste · Retenu</a:t>
+            </a:r>
+          </a:p>
+        </p:txBody>
+      </p:sp>
+      <p:sp>
+        <p:nvSpPr>
+          <p:cNvPr id="17" name="TextBox 16"/>
+          <p:cNvSpPr txBox="1"/>
+          <p:nvPr/>
+        </p:nvSpPr>
+        <p:spPr>
+          <a:xfrm>
+            <a:off x="914400" y="4709160"/>
+            <a:ext cx="2286000" cy="411480"/>
+          </a:xfrm>
+          <a:prstGeom prst="rect">
+            <a:avLst/>
+          </a:prstGeom>
+          <a:noFill/>
+        </p:spPr>
+        <p:txBody>
+          <a:bodyPr wrap="square">
+            <a:spAutoFit/>
+          </a:bodyPr>
+          <a:lstStyle/>
+          <a:p>
+            <a:pPr algn="l"/>
+            <a:r>
+              <a:rPr sz="1100" b="1" i="0">
+                <a:solidFill>
+                  <a:srgbClr val="3B82F6"/>
+                </a:solidFill>
+              </a:rPr>
+              <a:t>✅ Lasso</a:t>
+            </a:r>
+          </a:p>
+        </p:txBody>
+      </p:sp>
+      <p:sp>
+        <p:nvSpPr>
+          <p:cNvPr id="18" name="TextBox 17"/>
+          <p:cNvSpPr txBox="1"/>
+          <p:nvPr/>
+        </p:nvSpPr>
+        <p:spPr>
+          <a:xfrm>
+            <a:off x="3291840" y="4709160"/>
+            <a:ext cx="2834640" cy="411480"/>
+          </a:xfrm>
+          <a:prstGeom prst="rect">
+            <a:avLst/>
+          </a:prstGeom>
+          <a:noFill/>
+        </p:spPr>
+        <p:txBody>
+          <a:bodyPr wrap="square">
+            <a:spAutoFit/>
+          </a:bodyPr>
+          <a:lstStyle/>
+          <a:p>
+            <a:pPr algn="l"/>
+            <a:r>
+              <a:rPr sz="1100" b="0" i="1">
+                <a:solidFill>
+                  <a:srgbClr val="64748B"/>
+                </a:solidFill>
+              </a:rPr>
+              <a:t>R²=0.871 · Sélection features · Retenu</a:t>
+            </a:r>
+          </a:p>
+        </p:txBody>
+      </p:sp>
+      <p:sp>
+        <p:nvSpPr>
+          <p:cNvPr id="19" name="TextBox 18"/>
+          <p:cNvSpPr txBox="1"/>
+          <p:nvPr/>
+        </p:nvSpPr>
+        <p:spPr>
+          <a:xfrm>
+            <a:off x="914400" y="5212080"/>
+            <a:ext cx="2286000" cy="411480"/>
+          </a:xfrm>
+          <a:prstGeom prst="rect">
+            <a:avLst/>
+          </a:prstGeom>
+          <a:noFill/>
+        </p:spPr>
+        <p:txBody>
+          <a:bodyPr wrap="square">
+            <a:spAutoFit/>
+          </a:bodyPr>
+          <a:lstStyle/>
+          <a:p>
+            <a:pPr algn="l"/>
+            <a:r>
+              <a:rPr sz="1100" b="1" i="0">
+                <a:solidFill>
+                  <a:srgbClr val="64748B"/>
+                </a:solidFill>
+              </a:rPr>
+              <a:t>❌ Ridge</a:t>
+            </a:r>
+          </a:p>
+        </p:txBody>
+      </p:sp>
+      <p:sp>
+        <p:nvSpPr>
+          <p:cNvPr id="20" name="TextBox 19"/>
+          <p:cNvSpPr txBox="1"/>
+          <p:nvPr/>
+        </p:nvSpPr>
+        <p:spPr>
+          <a:xfrm>
+            <a:off x="3291840" y="5212080"/>
+            <a:ext cx="2834640" cy="411480"/>
+          </a:xfrm>
+          <a:prstGeom prst="rect">
+            <a:avLst/>
+          </a:prstGeom>
+          <a:noFill/>
+        </p:spPr>
+        <p:txBody>
+          <a:bodyPr wrap="square">
+            <a:spAutoFit/>
+          </a:bodyPr>
+          <a:lstStyle/>
+          <a:p>
+            <a:pPr algn="l"/>
+            <a:r>
+              <a:rPr sz="1100" b="0" i="1">
+                <a:solidFill>
+                  <a:srgbClr val="64748B"/>
+                </a:solidFill>
+              </a:rPr>
+              <a:t>R²=0.865 · Écarté → voir draft</a:t>
+            </a:r>
+          </a:p>
+        </p:txBody>
+      </p:sp>
+      <p:sp>
+        <p:nvSpPr>
+          <p:cNvPr id="21" name="TextBox 20"/>
+          <p:cNvSpPr txBox="1"/>
+          <p:nvPr/>
+        </p:nvSpPr>
+        <p:spPr>
+          <a:xfrm>
+            <a:off x="914400" y="5715000"/>
+            <a:ext cx="2286000" cy="411480"/>
+          </a:xfrm>
+          <a:prstGeom prst="rect">
+            <a:avLst/>
+          </a:prstGeom>
+          <a:noFill/>
+        </p:spPr>
+        <p:txBody>
+          <a:bodyPr wrap="square">
+            <a:spAutoFit/>
+          </a:bodyPr>
+          <a:lstStyle/>
+          <a:p>
+            <a:pPr algn="l"/>
+            <a:r>
+              <a:rPr sz="1100" b="1" i="0">
+                <a:solidFill>
+                  <a:srgbClr val="64748B"/>
+                </a:solidFill>
+              </a:rPr>
+              <a:t>❌ Decision Tree</a:t>
+            </a:r>
+          </a:p>
+        </p:txBody>
+      </p:sp>
+      <p:sp>
+        <p:nvSpPr>
+          <p:cNvPr id="22" name="TextBox 21"/>
+          <p:cNvSpPr txBox="1"/>
+          <p:nvPr/>
+        </p:nvSpPr>
+        <p:spPr>
+          <a:xfrm>
+            <a:off x="3291840" y="5715000"/>
+            <a:ext cx="2834640" cy="411480"/>
+          </a:xfrm>
+          <a:prstGeom prst="rect">
+            <a:avLst/>
+          </a:prstGeom>
+          <a:noFill/>
+        </p:spPr>
+        <p:txBody>
+          <a:bodyPr wrap="square">
+            <a:spAutoFit/>
+          </a:bodyPr>
+          <a:lstStyle/>
+          <a:p>
+            <a:pPr algn="l"/>
+            <a:r>
+              <a:rPr sz="1100" b="0" i="1">
+                <a:solidFill>
+                  <a:srgbClr val="64748B"/>
+                </a:solidFill>
+              </a:rPr>
+              <a:t>R²=0.762 · Overfitting · Écarté</a:t>
+            </a:r>
+          </a:p>
+        </p:txBody>
+      </p:sp>
+      <p:sp>
+        <p:nvSpPr>
+          <p:cNvPr id="23" name="Rectangle 22"/>
           <p:cNvSpPr/>
           <p:nvPr/>
         </p:nvSpPr>
         <p:spPr>
           <a:xfrm>
-            <a:off x="8686800" y="4572000"/>
-            <a:ext cx="2743200" cy="2743200"/>
-          </a:xfrm>
-          <a:prstGeom prst="ellipse">
+            <a:off x="6492240" y="1097280"/>
+            <a:ext cx="5486400" cy="5394960"/>
+          </a:xfrm>
+          <a:prstGeom prst="rect">
             <a:avLst/>
           </a:prstGeom>
           <a:solidFill>
-            <a:srgbClr val="052E16"/>
+            <a:srgbClr val="0A1A38"/>
           </a:solidFill>
           <a:ln>
             <a:noFill/>
@@ -12468,53 +13168,20 @@
           <a:lstStyle/>
           <a:p>
             <a:pPr algn="ctr"/>
-          </a:p>
-        </p:txBody>
-      </p:sp>
-      <p:sp>
-        <p:nvSpPr>
-          <p:cNvPr id="5" name="TextBox 4"/>
-          <p:cNvSpPr txBox="1"/>
-          <p:nvPr/>
-        </p:nvSpPr>
-        <p:spPr>
-          <a:xfrm>
-            <a:off x="731520" y="320040"/>
-            <a:ext cx="9144000" cy="640080"/>
-          </a:xfrm>
-          <a:prstGeom prst="rect">
-            <a:avLst/>
-          </a:prstGeom>
-          <a:noFill/>
-        </p:spPr>
-        <p:txBody>
-          <a:bodyPr wrap="square">
-            <a:spAutoFit/>
-          </a:bodyPr>
-          <a:lstStyle/>
-          <a:p>
-            <a:pPr algn="l"/>
-            <a:r>
-              <a:rPr sz="3200" b="1" i="0">
-                <a:solidFill>
-                  <a:srgbClr val="FFFFFF"/>
-                </a:solidFill>
-              </a:rPr>
-              <a:t>Conclusion &amp; Perspectives</a:t>
-            </a:r>
-          </a:p>
-        </p:txBody>
-      </p:sp>
-      <p:sp>
-        <p:nvSpPr>
-          <p:cNvPr id="6" name="Rectangle 5"/>
+            <a:endParaRPr/>
+          </a:p>
+        </p:txBody>
+      </p:sp>
+      <p:sp>
+        <p:nvSpPr>
+          <p:cNvPr id="24" name="Rectangle 23"/>
           <p:cNvSpPr/>
           <p:nvPr/>
         </p:nvSpPr>
         <p:spPr>
           <a:xfrm>
-            <a:off x="731520" y="960120"/>
-            <a:ext cx="4572000" cy="36576"/>
+            <a:off x="6492240" y="1097280"/>
+            <a:ext cx="54864" cy="5394960"/>
           </a:xfrm>
           <a:prstGeom prst="rect">
             <a:avLst/>
@@ -12545,174 +13212,54 @@
           <a:lstStyle/>
           <a:p>
             <a:pPr algn="ctr"/>
-          </a:p>
-        </p:txBody>
-      </p:sp>
-      <p:sp>
-        <p:nvSpPr>
-          <p:cNvPr id="7" name="Rectangle 6"/>
+            <a:endParaRPr/>
+          </a:p>
+        </p:txBody>
+      </p:sp>
+      <p:sp>
+        <p:nvSpPr>
+          <p:cNvPr id="25" name="TextBox 24"/>
+          <p:cNvSpPr txBox="1"/>
+          <p:nvPr/>
+        </p:nvSpPr>
+        <p:spPr>
+          <a:xfrm>
+            <a:off x="6720840" y="1188720"/>
+            <a:ext cx="5029200" cy="457200"/>
+          </a:xfrm>
+          <a:prstGeom prst="rect">
+            <a:avLst/>
+          </a:prstGeom>
+          <a:noFill/>
+        </p:spPr>
+        <p:txBody>
+          <a:bodyPr wrap="square">
+            <a:spAutoFit/>
+          </a:bodyPr>
+          <a:lstStyle/>
+          <a:p>
+            <a:pPr algn="l"/>
+            <a:r>
+              <a:rPr sz="1400" b="1" i="0">
+                <a:solidFill>
+                  <a:srgbClr val="FFFFFF"/>
+                </a:solidFill>
+              </a:rPr>
+              <a:t>🚀 Perspectives d'Amélioration</a:t>
+            </a:r>
+          </a:p>
+        </p:txBody>
+      </p:sp>
+      <p:sp>
+        <p:nvSpPr>
+          <p:cNvPr id="26" name="Rectangle 25"/>
           <p:cNvSpPr/>
           <p:nvPr/>
         </p:nvSpPr>
         <p:spPr>
           <a:xfrm>
-            <a:off x="685800" y="1097280"/>
-            <a:ext cx="5577840" cy="1920240"/>
-          </a:xfrm>
-          <a:prstGeom prst="rect">
-            <a:avLst/>
-          </a:prstGeom>
-          <a:solidFill>
-            <a:srgbClr val="052E16"/>
-          </a:solidFill>
-          <a:ln>
-            <a:noFill/>
-          </a:ln>
-        </p:spPr>
-        <p:style>
-          <a:lnRef idx="1">
-            <a:schemeClr val="accent1"/>
-          </a:lnRef>
-          <a:fillRef idx="3">
-            <a:schemeClr val="accent1"/>
-          </a:fillRef>
-          <a:effectRef idx="2">
-            <a:schemeClr val="accent1"/>
-          </a:effectRef>
-          <a:fontRef idx="minor">
-            <a:schemeClr val="lt1"/>
-          </a:fontRef>
-        </p:style>
-        <p:txBody>
-          <a:bodyPr rtlCol="0" anchor="ctr"/>
-          <a:lstStyle/>
-          <a:p>
-            <a:pPr algn="ctr"/>
-          </a:p>
-        </p:txBody>
-      </p:sp>
-      <p:sp>
-        <p:nvSpPr>
-          <p:cNvPr id="8" name="Rectangle 7"/>
-          <p:cNvSpPr/>
-          <p:nvPr/>
-        </p:nvSpPr>
-        <p:spPr>
-          <a:xfrm>
-            <a:off x="685800" y="1097280"/>
-            <a:ext cx="54864" cy="1920240"/>
-          </a:xfrm>
-          <a:prstGeom prst="rect">
-            <a:avLst/>
-          </a:prstGeom>
-          <a:solidFill>
-            <a:srgbClr val="16A34A"/>
-          </a:solidFill>
-          <a:ln>
-            <a:noFill/>
-          </a:ln>
-        </p:spPr>
-        <p:style>
-          <a:lnRef idx="1">
-            <a:schemeClr val="accent1"/>
-          </a:lnRef>
-          <a:fillRef idx="3">
-            <a:schemeClr val="accent1"/>
-          </a:fillRef>
-          <a:effectRef idx="2">
-            <a:schemeClr val="accent1"/>
-          </a:effectRef>
-          <a:fontRef idx="minor">
-            <a:schemeClr val="lt1"/>
-          </a:fontRef>
-        </p:style>
-        <p:txBody>
-          <a:bodyPr rtlCol="0" anchor="ctr"/>
-          <a:lstStyle/>
-          <a:p>
-            <a:pPr algn="ctr"/>
-          </a:p>
-        </p:txBody>
-      </p:sp>
-      <p:sp>
-        <p:nvSpPr>
-          <p:cNvPr id="9" name="TextBox 8"/>
-          <p:cNvSpPr txBox="1"/>
-          <p:nvPr/>
-        </p:nvSpPr>
-        <p:spPr>
-          <a:xfrm>
-            <a:off x="914400" y="1188720"/>
-            <a:ext cx="5212080" cy="457200"/>
-          </a:xfrm>
-          <a:prstGeom prst="rect">
-            <a:avLst/>
-          </a:prstGeom>
-          <a:noFill/>
-        </p:spPr>
-        <p:txBody>
-          <a:bodyPr wrap="square">
-            <a:spAutoFit/>
-          </a:bodyPr>
-          <a:lstStyle/>
-          <a:p>
-            <a:pPr algn="l"/>
-            <a:r>
-              <a:rPr sz="1600" b="1" i="0">
-                <a:solidFill>
-                  <a:srgbClr val="16A34A"/>
-                </a:solidFill>
-              </a:rPr>
-              <a:t>✅ Objectif atteint — R² = 0.905</a:t>
-            </a:r>
-          </a:p>
-        </p:txBody>
-      </p:sp>
-      <p:sp>
-        <p:nvSpPr>
-          <p:cNvPr id="10" name="TextBox 9"/>
-          <p:cNvSpPr txBox="1"/>
-          <p:nvPr/>
-        </p:nvSpPr>
-        <p:spPr>
-          <a:xfrm>
-            <a:off x="914400" y="1600200"/>
-            <a:ext cx="5212080" cy="777240"/>
-          </a:xfrm>
-          <a:prstGeom prst="rect">
-            <a:avLst/>
-          </a:prstGeom>
-          <a:noFill/>
-        </p:spPr>
-        <p:txBody>
-          <a:bodyPr wrap="square">
-            <a:spAutoFit/>
-          </a:bodyPr>
-          <a:lstStyle/>
-          <a:p>
-            <a:pPr algn="l"/>
-            <a:r>
-              <a:rPr sz="1200" b="0" i="0">
-                <a:solidFill>
-                  <a:srgbClr val="CBD5E1"/>
-                </a:solidFill>
-              </a:rPr>
-              <a:t>Gradient Boosting optimisé prédit les prix
-avec une précision de 90.5% (±$12K sur $163K médian)</a:t>
-            </a:r>
-          </a:p>
-        </p:txBody>
-      </p:sp>
-      <p:sp>
-        <p:nvSpPr>
-          <p:cNvPr id="11" name="Rectangle 10"/>
-          <p:cNvSpPr/>
-          <p:nvPr/>
-        </p:nvSpPr>
-        <p:spPr>
-          <a:xfrm>
-            <a:off x="685800" y="3154680"/>
-            <a:ext cx="5577840" cy="3337560"/>
+            <a:off x="6720840" y="1737360"/>
+            <a:ext cx="5029200" cy="749808"/>
           </a:xfrm>
           <a:prstGeom prst="rect">
             <a:avLst/>
@@ -12743,399 +13290,94 @@
           <a:lstStyle/>
           <a:p>
             <a:pPr algn="ctr"/>
-          </a:p>
-        </p:txBody>
-      </p:sp>
-      <p:sp>
-        <p:nvSpPr>
-          <p:cNvPr id="12" name="TextBox 11"/>
-          <p:cNvSpPr txBox="1"/>
-          <p:nvPr/>
-        </p:nvSpPr>
-        <p:spPr>
-          <a:xfrm>
-            <a:off x="914400" y="3291840"/>
-            <a:ext cx="5212080" cy="365760"/>
-          </a:xfrm>
-          <a:prstGeom prst="rect">
-            <a:avLst/>
-          </a:prstGeom>
-          <a:noFill/>
-        </p:spPr>
-        <p:txBody>
-          <a:bodyPr wrap="square">
-            <a:spAutoFit/>
-          </a:bodyPr>
-          <a:lstStyle/>
-          <a:p>
-            <a:pPr algn="l"/>
-            <a:r>
-              <a:rPr sz="1400" b="1" i="0">
-                <a:solidFill>
-                  <a:srgbClr val="FFFFFF"/>
-                </a:solidFill>
-              </a:rPr>
-              <a:t>📊 Bilan des Modèles</a:t>
-            </a:r>
-          </a:p>
-        </p:txBody>
-      </p:sp>
-      <p:sp>
-        <p:nvSpPr>
-          <p:cNvPr id="13" name="TextBox 12"/>
-          <p:cNvSpPr txBox="1"/>
-          <p:nvPr/>
-        </p:nvSpPr>
-        <p:spPr>
-          <a:xfrm>
-            <a:off x="914400" y="3703320"/>
-            <a:ext cx="2286000" cy="411480"/>
-          </a:xfrm>
-          <a:prstGeom prst="rect">
-            <a:avLst/>
-          </a:prstGeom>
-          <a:noFill/>
-        </p:spPr>
-        <p:txBody>
-          <a:bodyPr wrap="square">
-            <a:spAutoFit/>
-          </a:bodyPr>
-          <a:lstStyle/>
-          <a:p>
-            <a:pPr algn="l"/>
-            <a:r>
-              <a:rPr sz="1100" b="1" i="0">
-                <a:solidFill>
-                  <a:srgbClr val="16A34A"/>
-                </a:solidFill>
-              </a:rPr>
-              <a:t>✅ Gradient Boosting</a:t>
-            </a:r>
-          </a:p>
-        </p:txBody>
-      </p:sp>
-      <p:sp>
-        <p:nvSpPr>
-          <p:cNvPr id="14" name="TextBox 13"/>
-          <p:cNvSpPr txBox="1"/>
-          <p:nvPr/>
-        </p:nvSpPr>
-        <p:spPr>
-          <a:xfrm>
-            <a:off x="3291840" y="3703320"/>
-            <a:ext cx="2834640" cy="411480"/>
-          </a:xfrm>
-          <a:prstGeom prst="rect">
-            <a:avLst/>
-          </a:prstGeom>
-          <a:noFill/>
-        </p:spPr>
-        <p:txBody>
-          <a:bodyPr wrap="square">
-            <a:spAutoFit/>
-          </a:bodyPr>
-          <a:lstStyle/>
-          <a:p>
-            <a:pPr algn="l"/>
-            <a:r>
-              <a:rPr sz="1100" b="0" i="1">
+            <a:endParaRPr/>
+          </a:p>
+        </p:txBody>
+      </p:sp>
+      <p:sp>
+        <p:nvSpPr>
+          <p:cNvPr id="27" name="TextBox 26"/>
+          <p:cNvSpPr txBox="1"/>
+          <p:nvPr/>
+        </p:nvSpPr>
+        <p:spPr>
+          <a:xfrm>
+            <a:off x="6903720" y="1810512"/>
+            <a:ext cx="4754880" cy="347472"/>
+          </a:xfrm>
+          <a:prstGeom prst="rect">
+            <a:avLst/>
+          </a:prstGeom>
+          <a:noFill/>
+        </p:spPr>
+        <p:txBody>
+          <a:bodyPr wrap="square">
+            <a:spAutoFit/>
+          </a:bodyPr>
+          <a:lstStyle/>
+          <a:p>
+            <a:pPr algn="l"/>
+            <a:r>
+              <a:rPr sz="1200" b="1" i="0">
+                <a:solidFill>
+                  <a:srgbClr val="2563EB"/>
+                </a:solidFill>
+              </a:rPr>
+              <a:t>▸  XGBoost / LightGBM</a:t>
+            </a:r>
+          </a:p>
+        </p:txBody>
+      </p:sp>
+      <p:sp>
+        <p:nvSpPr>
+          <p:cNvPr id="28" name="TextBox 27"/>
+          <p:cNvSpPr txBox="1"/>
+          <p:nvPr/>
+        </p:nvSpPr>
+        <p:spPr>
+          <a:xfrm>
+            <a:off x="6903720" y="2121408"/>
+            <a:ext cx="4754880" cy="320040"/>
+          </a:xfrm>
+          <a:prstGeom prst="rect">
+            <a:avLst/>
+          </a:prstGeom>
+          <a:noFill/>
+        </p:spPr>
+        <p:txBody>
+          <a:bodyPr wrap="square">
+            <a:spAutoFit/>
+          </a:bodyPr>
+          <a:lstStyle/>
+          <a:p>
+            <a:pPr algn="l"/>
+            <a:r>
+              <a:rPr sz="1000" b="0" i="1">
                 <a:solidFill>
                   <a:srgbClr val="64748B"/>
                 </a:solidFill>
               </a:rPr>
-              <a:t>R²=0.905 · Meilleur modèle · Retenu</a:t>
-            </a:r>
-          </a:p>
-        </p:txBody>
-      </p:sp>
-      <p:sp>
-        <p:nvSpPr>
-          <p:cNvPr id="15" name="TextBox 14"/>
-          <p:cNvSpPr txBox="1"/>
-          <p:nvPr/>
-        </p:nvSpPr>
-        <p:spPr>
-          <a:xfrm>
-            <a:off x="914400" y="4206240"/>
-            <a:ext cx="2286000" cy="411480"/>
-          </a:xfrm>
-          <a:prstGeom prst="rect">
-            <a:avLst/>
-          </a:prstGeom>
-          <a:noFill/>
-        </p:spPr>
-        <p:txBody>
-          <a:bodyPr wrap="square">
-            <a:spAutoFit/>
-          </a:bodyPr>
-          <a:lstStyle/>
-          <a:p>
-            <a:pPr algn="l"/>
-            <a:r>
-              <a:rPr sz="1100" b="1" i="0">
-                <a:solidFill>
-                  <a:srgbClr val="3B82F6"/>
-                </a:solidFill>
-              </a:rPr>
-              <a:t>✅ Random Forest</a:t>
-            </a:r>
-          </a:p>
-        </p:txBody>
-      </p:sp>
-      <p:sp>
-        <p:nvSpPr>
-          <p:cNvPr id="16" name="TextBox 15"/>
-          <p:cNvSpPr txBox="1"/>
-          <p:nvPr/>
-        </p:nvSpPr>
-        <p:spPr>
-          <a:xfrm>
-            <a:off x="3291840" y="4206240"/>
-            <a:ext cx="2834640" cy="411480"/>
-          </a:xfrm>
-          <a:prstGeom prst="rect">
-            <a:avLst/>
-          </a:prstGeom>
-          <a:noFill/>
-        </p:spPr>
-        <p:txBody>
-          <a:bodyPr wrap="square">
-            <a:spAutoFit/>
-          </a:bodyPr>
-          <a:lstStyle/>
-          <a:p>
-            <a:pPr algn="l"/>
-            <a:r>
-              <a:rPr sz="1100" b="0" i="1">
-                <a:solidFill>
-                  <a:srgbClr val="64748B"/>
-                </a:solidFill>
-              </a:rPr>
-              <a:t>R²=0.872 · Robuste · Retenu</a:t>
-            </a:r>
-          </a:p>
-        </p:txBody>
-      </p:sp>
-      <p:sp>
-        <p:nvSpPr>
-          <p:cNvPr id="17" name="TextBox 16"/>
-          <p:cNvSpPr txBox="1"/>
-          <p:nvPr/>
-        </p:nvSpPr>
-        <p:spPr>
-          <a:xfrm>
-            <a:off x="914400" y="4709160"/>
-            <a:ext cx="2286000" cy="411480"/>
-          </a:xfrm>
-          <a:prstGeom prst="rect">
-            <a:avLst/>
-          </a:prstGeom>
-          <a:noFill/>
-        </p:spPr>
-        <p:txBody>
-          <a:bodyPr wrap="square">
-            <a:spAutoFit/>
-          </a:bodyPr>
-          <a:lstStyle/>
-          <a:p>
-            <a:pPr algn="l"/>
-            <a:r>
-              <a:rPr sz="1100" b="1" i="0">
-                <a:solidFill>
-                  <a:srgbClr val="3B82F6"/>
-                </a:solidFill>
-              </a:rPr>
-              <a:t>✅ Lasso</a:t>
-            </a:r>
-          </a:p>
-        </p:txBody>
-      </p:sp>
-      <p:sp>
-        <p:nvSpPr>
-          <p:cNvPr id="18" name="TextBox 17"/>
-          <p:cNvSpPr txBox="1"/>
-          <p:nvPr/>
-        </p:nvSpPr>
-        <p:spPr>
-          <a:xfrm>
-            <a:off x="3291840" y="4709160"/>
-            <a:ext cx="2834640" cy="411480"/>
-          </a:xfrm>
-          <a:prstGeom prst="rect">
-            <a:avLst/>
-          </a:prstGeom>
-          <a:noFill/>
-        </p:spPr>
-        <p:txBody>
-          <a:bodyPr wrap="square">
-            <a:spAutoFit/>
-          </a:bodyPr>
-          <a:lstStyle/>
-          <a:p>
-            <a:pPr algn="l"/>
-            <a:r>
-              <a:rPr sz="1100" b="0" i="1">
-                <a:solidFill>
-                  <a:srgbClr val="64748B"/>
-                </a:solidFill>
-              </a:rPr>
-              <a:t>R²=0.871 · Sélection features · Retenu</a:t>
-            </a:r>
-          </a:p>
-        </p:txBody>
-      </p:sp>
-      <p:sp>
-        <p:nvSpPr>
-          <p:cNvPr id="19" name="TextBox 18"/>
-          <p:cNvSpPr txBox="1"/>
-          <p:nvPr/>
-        </p:nvSpPr>
-        <p:spPr>
-          <a:xfrm>
-            <a:off x="914400" y="5212080"/>
-            <a:ext cx="2286000" cy="411480"/>
-          </a:xfrm>
-          <a:prstGeom prst="rect">
-            <a:avLst/>
-          </a:prstGeom>
-          <a:noFill/>
-        </p:spPr>
-        <p:txBody>
-          <a:bodyPr wrap="square">
-            <a:spAutoFit/>
-          </a:bodyPr>
-          <a:lstStyle/>
-          <a:p>
-            <a:pPr algn="l"/>
-            <a:r>
-              <a:rPr sz="1100" b="1" i="0">
-                <a:solidFill>
-                  <a:srgbClr val="64748B"/>
-                </a:solidFill>
-              </a:rPr>
-              <a:t>❌ Ridge</a:t>
-            </a:r>
-          </a:p>
-        </p:txBody>
-      </p:sp>
-      <p:sp>
-        <p:nvSpPr>
-          <p:cNvPr id="20" name="TextBox 19"/>
-          <p:cNvSpPr txBox="1"/>
-          <p:nvPr/>
-        </p:nvSpPr>
-        <p:spPr>
-          <a:xfrm>
-            <a:off x="3291840" y="5212080"/>
-            <a:ext cx="2834640" cy="411480"/>
-          </a:xfrm>
-          <a:prstGeom prst="rect">
-            <a:avLst/>
-          </a:prstGeom>
-          <a:noFill/>
-        </p:spPr>
-        <p:txBody>
-          <a:bodyPr wrap="square">
-            <a:spAutoFit/>
-          </a:bodyPr>
-          <a:lstStyle/>
-          <a:p>
-            <a:pPr algn="l"/>
-            <a:r>
-              <a:rPr sz="1100" b="0" i="1">
-                <a:solidFill>
-                  <a:srgbClr val="64748B"/>
-                </a:solidFill>
-              </a:rPr>
-              <a:t>R²=0.865 · Écarté → voir draft</a:t>
-            </a:r>
-          </a:p>
-        </p:txBody>
-      </p:sp>
-      <p:sp>
-        <p:nvSpPr>
-          <p:cNvPr id="21" name="TextBox 20"/>
-          <p:cNvSpPr txBox="1"/>
-          <p:nvPr/>
-        </p:nvSpPr>
-        <p:spPr>
-          <a:xfrm>
-            <a:off x="914400" y="5715000"/>
-            <a:ext cx="2286000" cy="411480"/>
-          </a:xfrm>
-          <a:prstGeom prst="rect">
-            <a:avLst/>
-          </a:prstGeom>
-          <a:noFill/>
-        </p:spPr>
-        <p:txBody>
-          <a:bodyPr wrap="square">
-            <a:spAutoFit/>
-          </a:bodyPr>
-          <a:lstStyle/>
-          <a:p>
-            <a:pPr algn="l"/>
-            <a:r>
-              <a:rPr sz="1100" b="1" i="0">
-                <a:solidFill>
-                  <a:srgbClr val="64748B"/>
-                </a:solidFill>
-              </a:rPr>
-              <a:t>❌ Decision Tree</a:t>
-            </a:r>
-          </a:p>
-        </p:txBody>
-      </p:sp>
-      <p:sp>
-        <p:nvSpPr>
-          <p:cNvPr id="22" name="TextBox 21"/>
-          <p:cNvSpPr txBox="1"/>
-          <p:nvPr/>
-        </p:nvSpPr>
-        <p:spPr>
-          <a:xfrm>
-            <a:off x="3291840" y="5715000"/>
-            <a:ext cx="2834640" cy="411480"/>
-          </a:xfrm>
-          <a:prstGeom prst="rect">
-            <a:avLst/>
-          </a:prstGeom>
-          <a:noFill/>
-        </p:spPr>
-        <p:txBody>
-          <a:bodyPr wrap="square">
-            <a:spAutoFit/>
-          </a:bodyPr>
-          <a:lstStyle/>
-          <a:p>
-            <a:pPr algn="l"/>
-            <a:r>
-              <a:rPr sz="1100" b="0" i="1">
-                <a:solidFill>
-                  <a:srgbClr val="64748B"/>
-                </a:solidFill>
-              </a:rPr>
-              <a:t>R²=0.762 · Overfitting · Écarté</a:t>
-            </a:r>
-          </a:p>
-        </p:txBody>
-      </p:sp>
-      <p:sp>
-        <p:nvSpPr>
-          <p:cNvPr id="23" name="Rectangle 22"/>
+              <a:t>Algorithmes de boosting avancés</a:t>
+            </a:r>
+          </a:p>
+        </p:txBody>
+      </p:sp>
+      <p:sp>
+        <p:nvSpPr>
+          <p:cNvPr id="29" name="Rectangle 28"/>
           <p:cNvSpPr/>
           <p:nvPr/>
         </p:nvSpPr>
         <p:spPr>
           <a:xfrm>
-            <a:off x="6492240" y="1097280"/>
-            <a:ext cx="5486400" cy="5394960"/>
+            <a:off x="6720840" y="2606040"/>
+            <a:ext cx="5029200" cy="749808"/>
           </a:xfrm>
           <a:prstGeom prst="rect">
             <a:avLst/>
           </a:prstGeom>
           <a:solidFill>
-            <a:srgbClr val="0A1A38"/>
+            <a:srgbClr val="0F2A50"/>
           </a:solidFill>
           <a:ln>
             <a:noFill/>
@@ -13160,19 +13402,424 @@
           <a:lstStyle/>
           <a:p>
             <a:pPr algn="ctr"/>
-          </a:p>
-        </p:txBody>
-      </p:sp>
-      <p:sp>
-        <p:nvSpPr>
-          <p:cNvPr id="24" name="Rectangle 23"/>
+            <a:endParaRPr/>
+          </a:p>
+        </p:txBody>
+      </p:sp>
+      <p:sp>
+        <p:nvSpPr>
+          <p:cNvPr id="30" name="TextBox 29"/>
+          <p:cNvSpPr txBox="1"/>
+          <p:nvPr/>
+        </p:nvSpPr>
+        <p:spPr>
+          <a:xfrm>
+            <a:off x="6903720" y="2679192"/>
+            <a:ext cx="4754880" cy="347472"/>
+          </a:xfrm>
+          <a:prstGeom prst="rect">
+            <a:avLst/>
+          </a:prstGeom>
+          <a:noFill/>
+        </p:spPr>
+        <p:txBody>
+          <a:bodyPr wrap="square">
+            <a:spAutoFit/>
+          </a:bodyPr>
+          <a:lstStyle/>
+          <a:p>
+            <a:pPr algn="l"/>
+            <a:r>
+              <a:rPr sz="1200" b="1" i="0">
+                <a:solidFill>
+                  <a:srgbClr val="2563EB"/>
+                </a:solidFill>
+              </a:rPr>
+              <a:t>▸  Stacking / Blending</a:t>
+            </a:r>
+          </a:p>
+        </p:txBody>
+      </p:sp>
+      <p:sp>
+        <p:nvSpPr>
+          <p:cNvPr id="31" name="TextBox 30"/>
+          <p:cNvSpPr txBox="1"/>
+          <p:nvPr/>
+        </p:nvSpPr>
+        <p:spPr>
+          <a:xfrm>
+            <a:off x="6903720" y="2990088"/>
+            <a:ext cx="4754880" cy="320040"/>
+          </a:xfrm>
+          <a:prstGeom prst="rect">
+            <a:avLst/>
+          </a:prstGeom>
+          <a:noFill/>
+        </p:spPr>
+        <p:txBody>
+          <a:bodyPr wrap="square">
+            <a:spAutoFit/>
+          </a:bodyPr>
+          <a:lstStyle/>
+          <a:p>
+            <a:pPr algn="l"/>
+            <a:r>
+              <a:rPr sz="1000" b="0" i="1">
+                <a:solidFill>
+                  <a:srgbClr val="64748B"/>
+                </a:solidFill>
+              </a:rPr>
+              <a:t>Combinaison de plusieurs modèles</a:t>
+            </a:r>
+          </a:p>
+        </p:txBody>
+      </p:sp>
+      <p:sp>
+        <p:nvSpPr>
+          <p:cNvPr id="32" name="Rectangle 31"/>
           <p:cNvSpPr/>
           <p:nvPr/>
         </p:nvSpPr>
         <p:spPr>
           <a:xfrm>
-            <a:off x="6492240" y="1097280"/>
-            <a:ext cx="54864" cy="5394960"/>
+            <a:off x="6720840" y="3474720"/>
+            <a:ext cx="5029200" cy="749808"/>
+          </a:xfrm>
+          <a:prstGeom prst="rect">
+            <a:avLst/>
+          </a:prstGeom>
+          <a:solidFill>
+            <a:srgbClr val="0F2A50"/>
+          </a:solidFill>
+          <a:ln>
+            <a:noFill/>
+          </a:ln>
+        </p:spPr>
+        <p:style>
+          <a:lnRef idx="1">
+            <a:schemeClr val="accent1"/>
+          </a:lnRef>
+          <a:fillRef idx="3">
+            <a:schemeClr val="accent1"/>
+          </a:fillRef>
+          <a:effectRef idx="2">
+            <a:schemeClr val="accent1"/>
+          </a:effectRef>
+          <a:fontRef idx="minor">
+            <a:schemeClr val="lt1"/>
+          </a:fontRef>
+        </p:style>
+        <p:txBody>
+          <a:bodyPr rtlCol="0" anchor="ctr"/>
+          <a:lstStyle/>
+          <a:p>
+            <a:pPr algn="ctr"/>
+            <a:endParaRPr/>
+          </a:p>
+        </p:txBody>
+      </p:sp>
+      <p:sp>
+        <p:nvSpPr>
+          <p:cNvPr id="33" name="TextBox 32"/>
+          <p:cNvSpPr txBox="1"/>
+          <p:nvPr/>
+        </p:nvSpPr>
+        <p:spPr>
+          <a:xfrm>
+            <a:off x="6903720" y="3547872"/>
+            <a:ext cx="4754880" cy="347472"/>
+          </a:xfrm>
+          <a:prstGeom prst="rect">
+            <a:avLst/>
+          </a:prstGeom>
+          <a:noFill/>
+        </p:spPr>
+        <p:txBody>
+          <a:bodyPr wrap="square">
+            <a:spAutoFit/>
+          </a:bodyPr>
+          <a:lstStyle/>
+          <a:p>
+            <a:pPr algn="l"/>
+            <a:r>
+              <a:rPr sz="1200" b="1" i="0">
+                <a:solidFill>
+                  <a:srgbClr val="2563EB"/>
+                </a:solidFill>
+              </a:rPr>
+              <a:t>▸  Deep Learning (MLP)</a:t>
+            </a:r>
+          </a:p>
+        </p:txBody>
+      </p:sp>
+      <p:sp>
+        <p:nvSpPr>
+          <p:cNvPr id="34" name="TextBox 33"/>
+          <p:cNvSpPr txBox="1"/>
+          <p:nvPr/>
+        </p:nvSpPr>
+        <p:spPr>
+          <a:xfrm>
+            <a:off x="6903720" y="3858768"/>
+            <a:ext cx="4754880" cy="320040"/>
+          </a:xfrm>
+          <a:prstGeom prst="rect">
+            <a:avLst/>
+          </a:prstGeom>
+          <a:noFill/>
+        </p:spPr>
+        <p:txBody>
+          <a:bodyPr wrap="square">
+            <a:spAutoFit/>
+          </a:bodyPr>
+          <a:lstStyle/>
+          <a:p>
+            <a:pPr algn="l"/>
+            <a:r>
+              <a:rPr sz="1000" b="0" i="1">
+                <a:solidFill>
+                  <a:srgbClr val="64748B"/>
+                </a:solidFill>
+              </a:rPr>
+              <a:t>Réseau de neurones pour régression</a:t>
+            </a:r>
+          </a:p>
+        </p:txBody>
+      </p:sp>
+      <p:sp>
+        <p:nvSpPr>
+          <p:cNvPr id="35" name="Rectangle 34"/>
+          <p:cNvSpPr/>
+          <p:nvPr/>
+        </p:nvSpPr>
+        <p:spPr>
+          <a:xfrm>
+            <a:off x="6720840" y="4343400"/>
+            <a:ext cx="5029200" cy="749808"/>
+          </a:xfrm>
+          <a:prstGeom prst="rect">
+            <a:avLst/>
+          </a:prstGeom>
+          <a:solidFill>
+            <a:srgbClr val="0F2A50"/>
+          </a:solidFill>
+          <a:ln>
+            <a:noFill/>
+          </a:ln>
+        </p:spPr>
+        <p:style>
+          <a:lnRef idx="1">
+            <a:schemeClr val="accent1"/>
+          </a:lnRef>
+          <a:fillRef idx="3">
+            <a:schemeClr val="accent1"/>
+          </a:fillRef>
+          <a:effectRef idx="2">
+            <a:schemeClr val="accent1"/>
+          </a:effectRef>
+          <a:fontRef idx="minor">
+            <a:schemeClr val="lt1"/>
+          </a:fontRef>
+        </p:style>
+        <p:txBody>
+          <a:bodyPr rtlCol="0" anchor="ctr"/>
+          <a:lstStyle/>
+          <a:p>
+            <a:pPr algn="ctr"/>
+            <a:endParaRPr/>
+          </a:p>
+        </p:txBody>
+      </p:sp>
+      <p:sp>
+        <p:nvSpPr>
+          <p:cNvPr id="36" name="TextBox 35"/>
+          <p:cNvSpPr txBox="1"/>
+          <p:nvPr/>
+        </p:nvSpPr>
+        <p:spPr>
+          <a:xfrm>
+            <a:off x="6903720" y="4416552"/>
+            <a:ext cx="4754880" cy="347472"/>
+          </a:xfrm>
+          <a:prstGeom prst="rect">
+            <a:avLst/>
+          </a:prstGeom>
+          <a:noFill/>
+        </p:spPr>
+        <p:txBody>
+          <a:bodyPr wrap="square">
+            <a:spAutoFit/>
+          </a:bodyPr>
+          <a:lstStyle/>
+          <a:p>
+            <a:pPr algn="l"/>
+            <a:r>
+              <a:rPr sz="1200" b="1" i="0">
+                <a:solidFill>
+                  <a:srgbClr val="2563EB"/>
+                </a:solidFill>
+              </a:rPr>
+              <a:t>▸  Données supplémentaires</a:t>
+            </a:r>
+          </a:p>
+        </p:txBody>
+      </p:sp>
+      <p:sp>
+        <p:nvSpPr>
+          <p:cNvPr id="37" name="TextBox 36"/>
+          <p:cNvSpPr txBox="1"/>
+          <p:nvPr/>
+        </p:nvSpPr>
+        <p:spPr>
+          <a:xfrm>
+            <a:off x="6903720" y="4727448"/>
+            <a:ext cx="4754880" cy="320040"/>
+          </a:xfrm>
+          <a:prstGeom prst="rect">
+            <a:avLst/>
+          </a:prstGeom>
+          <a:noFill/>
+        </p:spPr>
+        <p:txBody>
+          <a:bodyPr wrap="square">
+            <a:spAutoFit/>
+          </a:bodyPr>
+          <a:lstStyle/>
+          <a:p>
+            <a:pPr algn="l"/>
+            <a:r>
+              <a:rPr sz="1000" b="0" i="1">
+                <a:solidFill>
+                  <a:srgbClr val="64748B"/>
+                </a:solidFill>
+              </a:rPr>
+              <a:t>Enrichir avec données géo/macro</a:t>
+            </a:r>
+          </a:p>
+        </p:txBody>
+      </p:sp>
+      <p:sp>
+        <p:nvSpPr>
+          <p:cNvPr id="38" name="Rectangle 37"/>
+          <p:cNvSpPr/>
+          <p:nvPr/>
+        </p:nvSpPr>
+        <p:spPr>
+          <a:xfrm>
+            <a:off x="6720840" y="5212080"/>
+            <a:ext cx="5029200" cy="749808"/>
+          </a:xfrm>
+          <a:prstGeom prst="rect">
+            <a:avLst/>
+          </a:prstGeom>
+          <a:solidFill>
+            <a:srgbClr val="0F2A50"/>
+          </a:solidFill>
+          <a:ln>
+            <a:noFill/>
+          </a:ln>
+        </p:spPr>
+        <p:style>
+          <a:lnRef idx="1">
+            <a:schemeClr val="accent1"/>
+          </a:lnRef>
+          <a:fillRef idx="3">
+            <a:schemeClr val="accent1"/>
+          </a:fillRef>
+          <a:effectRef idx="2">
+            <a:schemeClr val="accent1"/>
+          </a:effectRef>
+          <a:fontRef idx="minor">
+            <a:schemeClr val="lt1"/>
+          </a:fontRef>
+        </p:style>
+        <p:txBody>
+          <a:bodyPr rtlCol="0" anchor="ctr"/>
+          <a:lstStyle/>
+          <a:p>
+            <a:pPr algn="ctr"/>
+            <a:endParaRPr/>
+          </a:p>
+        </p:txBody>
+      </p:sp>
+      <p:sp>
+        <p:nvSpPr>
+          <p:cNvPr id="39" name="TextBox 38"/>
+          <p:cNvSpPr txBox="1"/>
+          <p:nvPr/>
+        </p:nvSpPr>
+        <p:spPr>
+          <a:xfrm>
+            <a:off x="6903720" y="5285232"/>
+            <a:ext cx="4754880" cy="347472"/>
+          </a:xfrm>
+          <a:prstGeom prst="rect">
+            <a:avLst/>
+          </a:prstGeom>
+          <a:noFill/>
+        </p:spPr>
+        <p:txBody>
+          <a:bodyPr wrap="square">
+            <a:spAutoFit/>
+          </a:bodyPr>
+          <a:lstStyle/>
+          <a:p>
+            <a:pPr algn="l"/>
+            <a:r>
+              <a:rPr sz="1200" b="1" i="0">
+                <a:solidFill>
+                  <a:srgbClr val="2563EB"/>
+                </a:solidFill>
+              </a:rPr>
+              <a:t>▸  API de prédiction</a:t>
+            </a:r>
+          </a:p>
+        </p:txBody>
+      </p:sp>
+      <p:sp>
+        <p:nvSpPr>
+          <p:cNvPr id="40" name="TextBox 39"/>
+          <p:cNvSpPr txBox="1"/>
+          <p:nvPr/>
+        </p:nvSpPr>
+        <p:spPr>
+          <a:xfrm>
+            <a:off x="6903720" y="5596128"/>
+            <a:ext cx="4754880" cy="320040"/>
+          </a:xfrm>
+          <a:prstGeom prst="rect">
+            <a:avLst/>
+          </a:prstGeom>
+          <a:noFill/>
+        </p:spPr>
+        <p:txBody>
+          <a:bodyPr wrap="square">
+            <a:spAutoFit/>
+          </a:bodyPr>
+          <a:lstStyle/>
+          <a:p>
+            <a:pPr algn="l"/>
+            <a:r>
+              <a:rPr sz="1000" b="0" i="1">
+                <a:solidFill>
+                  <a:srgbClr val="64748B"/>
+                </a:solidFill>
+              </a:rPr>
+              <a:t>Déploiement FastAPI + Streamlit</a:t>
+            </a:r>
+          </a:p>
+        </p:txBody>
+      </p:sp>
+      <p:sp>
+        <p:nvSpPr>
+          <p:cNvPr id="41" name="Rectangle 40"/>
+          <p:cNvSpPr/>
+          <p:nvPr/>
+        </p:nvSpPr>
+        <p:spPr>
+          <a:xfrm>
+            <a:off x="685800" y="6492240"/>
+            <a:ext cx="11292840" cy="36576"/>
           </a:xfrm>
           <a:prstGeom prst="rect">
             <a:avLst/>
@@ -13203,638 +13850,7 @@
           <a:lstStyle/>
           <a:p>
             <a:pPr algn="ctr"/>
-          </a:p>
-        </p:txBody>
-      </p:sp>
-      <p:sp>
-        <p:nvSpPr>
-          <p:cNvPr id="25" name="TextBox 24"/>
-          <p:cNvSpPr txBox="1"/>
-          <p:nvPr/>
-        </p:nvSpPr>
-        <p:spPr>
-          <a:xfrm>
-            <a:off x="6720840" y="1188720"/>
-            <a:ext cx="5029200" cy="457200"/>
-          </a:xfrm>
-          <a:prstGeom prst="rect">
-            <a:avLst/>
-          </a:prstGeom>
-          <a:noFill/>
-        </p:spPr>
-        <p:txBody>
-          <a:bodyPr wrap="square">
-            <a:spAutoFit/>
-          </a:bodyPr>
-          <a:lstStyle/>
-          <a:p>
-            <a:pPr algn="l"/>
-            <a:r>
-              <a:rPr sz="1400" b="1" i="0">
-                <a:solidFill>
-                  <a:srgbClr val="FFFFFF"/>
-                </a:solidFill>
-              </a:rPr>
-              <a:t>🚀 Perspectives d'Amélioration</a:t>
-            </a:r>
-          </a:p>
-        </p:txBody>
-      </p:sp>
-      <p:sp>
-        <p:nvSpPr>
-          <p:cNvPr id="26" name="Rectangle 25"/>
-          <p:cNvSpPr/>
-          <p:nvPr/>
-        </p:nvSpPr>
-        <p:spPr>
-          <a:xfrm>
-            <a:off x="6720840" y="1737360"/>
-            <a:ext cx="5029200" cy="749808"/>
-          </a:xfrm>
-          <a:prstGeom prst="rect">
-            <a:avLst/>
-          </a:prstGeom>
-          <a:solidFill>
-            <a:srgbClr val="0F2A50"/>
-          </a:solidFill>
-          <a:ln>
-            <a:noFill/>
-          </a:ln>
-        </p:spPr>
-        <p:style>
-          <a:lnRef idx="1">
-            <a:schemeClr val="accent1"/>
-          </a:lnRef>
-          <a:fillRef idx="3">
-            <a:schemeClr val="accent1"/>
-          </a:fillRef>
-          <a:effectRef idx="2">
-            <a:schemeClr val="accent1"/>
-          </a:effectRef>
-          <a:fontRef idx="minor">
-            <a:schemeClr val="lt1"/>
-          </a:fontRef>
-        </p:style>
-        <p:txBody>
-          <a:bodyPr rtlCol="0" anchor="ctr"/>
-          <a:lstStyle/>
-          <a:p>
-            <a:pPr algn="ctr"/>
-          </a:p>
-        </p:txBody>
-      </p:sp>
-      <p:sp>
-        <p:nvSpPr>
-          <p:cNvPr id="27" name="TextBox 26"/>
-          <p:cNvSpPr txBox="1"/>
-          <p:nvPr/>
-        </p:nvSpPr>
-        <p:spPr>
-          <a:xfrm>
-            <a:off x="6903720" y="1810512"/>
-            <a:ext cx="4754880" cy="347472"/>
-          </a:xfrm>
-          <a:prstGeom prst="rect">
-            <a:avLst/>
-          </a:prstGeom>
-          <a:noFill/>
-        </p:spPr>
-        <p:txBody>
-          <a:bodyPr wrap="square">
-            <a:spAutoFit/>
-          </a:bodyPr>
-          <a:lstStyle/>
-          <a:p>
-            <a:pPr algn="l"/>
-            <a:r>
-              <a:rPr sz="1200" b="1" i="0">
-                <a:solidFill>
-                  <a:srgbClr val="2563EB"/>
-                </a:solidFill>
-              </a:rPr>
-              <a:t>▸  XGBoost / LightGBM</a:t>
-            </a:r>
-          </a:p>
-        </p:txBody>
-      </p:sp>
-      <p:sp>
-        <p:nvSpPr>
-          <p:cNvPr id="28" name="TextBox 27"/>
-          <p:cNvSpPr txBox="1"/>
-          <p:nvPr/>
-        </p:nvSpPr>
-        <p:spPr>
-          <a:xfrm>
-            <a:off x="6903720" y="2121408"/>
-            <a:ext cx="4754880" cy="320040"/>
-          </a:xfrm>
-          <a:prstGeom prst="rect">
-            <a:avLst/>
-          </a:prstGeom>
-          <a:noFill/>
-        </p:spPr>
-        <p:txBody>
-          <a:bodyPr wrap="square">
-            <a:spAutoFit/>
-          </a:bodyPr>
-          <a:lstStyle/>
-          <a:p>
-            <a:pPr algn="l"/>
-            <a:r>
-              <a:rPr sz="1000" b="0" i="1">
-                <a:solidFill>
-                  <a:srgbClr val="64748B"/>
-                </a:solidFill>
-              </a:rPr>
-              <a:t>Algorithmes de boosting avancés</a:t>
-            </a:r>
-          </a:p>
-        </p:txBody>
-      </p:sp>
-      <p:sp>
-        <p:nvSpPr>
-          <p:cNvPr id="29" name="Rectangle 28"/>
-          <p:cNvSpPr/>
-          <p:nvPr/>
-        </p:nvSpPr>
-        <p:spPr>
-          <a:xfrm>
-            <a:off x="6720840" y="2606040"/>
-            <a:ext cx="5029200" cy="749808"/>
-          </a:xfrm>
-          <a:prstGeom prst="rect">
-            <a:avLst/>
-          </a:prstGeom>
-          <a:solidFill>
-            <a:srgbClr val="0F2A50"/>
-          </a:solidFill>
-          <a:ln>
-            <a:noFill/>
-          </a:ln>
-        </p:spPr>
-        <p:style>
-          <a:lnRef idx="1">
-            <a:schemeClr val="accent1"/>
-          </a:lnRef>
-          <a:fillRef idx="3">
-            <a:schemeClr val="accent1"/>
-          </a:fillRef>
-          <a:effectRef idx="2">
-            <a:schemeClr val="accent1"/>
-          </a:effectRef>
-          <a:fontRef idx="minor">
-            <a:schemeClr val="lt1"/>
-          </a:fontRef>
-        </p:style>
-        <p:txBody>
-          <a:bodyPr rtlCol="0" anchor="ctr"/>
-          <a:lstStyle/>
-          <a:p>
-            <a:pPr algn="ctr"/>
-          </a:p>
-        </p:txBody>
-      </p:sp>
-      <p:sp>
-        <p:nvSpPr>
-          <p:cNvPr id="30" name="TextBox 29"/>
-          <p:cNvSpPr txBox="1"/>
-          <p:nvPr/>
-        </p:nvSpPr>
-        <p:spPr>
-          <a:xfrm>
-            <a:off x="6903720" y="2679192"/>
-            <a:ext cx="4754880" cy="347472"/>
-          </a:xfrm>
-          <a:prstGeom prst="rect">
-            <a:avLst/>
-          </a:prstGeom>
-          <a:noFill/>
-        </p:spPr>
-        <p:txBody>
-          <a:bodyPr wrap="square">
-            <a:spAutoFit/>
-          </a:bodyPr>
-          <a:lstStyle/>
-          <a:p>
-            <a:pPr algn="l"/>
-            <a:r>
-              <a:rPr sz="1200" b="1" i="0">
-                <a:solidFill>
-                  <a:srgbClr val="2563EB"/>
-                </a:solidFill>
-              </a:rPr>
-              <a:t>▸  Stacking / Blending</a:t>
-            </a:r>
-          </a:p>
-        </p:txBody>
-      </p:sp>
-      <p:sp>
-        <p:nvSpPr>
-          <p:cNvPr id="31" name="TextBox 30"/>
-          <p:cNvSpPr txBox="1"/>
-          <p:nvPr/>
-        </p:nvSpPr>
-        <p:spPr>
-          <a:xfrm>
-            <a:off x="6903720" y="2990088"/>
-            <a:ext cx="4754880" cy="320040"/>
-          </a:xfrm>
-          <a:prstGeom prst="rect">
-            <a:avLst/>
-          </a:prstGeom>
-          <a:noFill/>
-        </p:spPr>
-        <p:txBody>
-          <a:bodyPr wrap="square">
-            <a:spAutoFit/>
-          </a:bodyPr>
-          <a:lstStyle/>
-          <a:p>
-            <a:pPr algn="l"/>
-            <a:r>
-              <a:rPr sz="1000" b="0" i="1">
-                <a:solidFill>
-                  <a:srgbClr val="64748B"/>
-                </a:solidFill>
-              </a:rPr>
-              <a:t>Combinaison de plusieurs modèles</a:t>
-            </a:r>
-          </a:p>
-        </p:txBody>
-      </p:sp>
-      <p:sp>
-        <p:nvSpPr>
-          <p:cNvPr id="32" name="Rectangle 31"/>
-          <p:cNvSpPr/>
-          <p:nvPr/>
-        </p:nvSpPr>
-        <p:spPr>
-          <a:xfrm>
-            <a:off x="6720840" y="3474720"/>
-            <a:ext cx="5029200" cy="749808"/>
-          </a:xfrm>
-          <a:prstGeom prst="rect">
-            <a:avLst/>
-          </a:prstGeom>
-          <a:solidFill>
-            <a:srgbClr val="0F2A50"/>
-          </a:solidFill>
-          <a:ln>
-            <a:noFill/>
-          </a:ln>
-        </p:spPr>
-        <p:style>
-          <a:lnRef idx="1">
-            <a:schemeClr val="accent1"/>
-          </a:lnRef>
-          <a:fillRef idx="3">
-            <a:schemeClr val="accent1"/>
-          </a:fillRef>
-          <a:effectRef idx="2">
-            <a:schemeClr val="accent1"/>
-          </a:effectRef>
-          <a:fontRef idx="minor">
-            <a:schemeClr val="lt1"/>
-          </a:fontRef>
-        </p:style>
-        <p:txBody>
-          <a:bodyPr rtlCol="0" anchor="ctr"/>
-          <a:lstStyle/>
-          <a:p>
-            <a:pPr algn="ctr"/>
-          </a:p>
-        </p:txBody>
-      </p:sp>
-      <p:sp>
-        <p:nvSpPr>
-          <p:cNvPr id="33" name="TextBox 32"/>
-          <p:cNvSpPr txBox="1"/>
-          <p:nvPr/>
-        </p:nvSpPr>
-        <p:spPr>
-          <a:xfrm>
-            <a:off x="6903720" y="3547872"/>
-            <a:ext cx="4754880" cy="347472"/>
-          </a:xfrm>
-          <a:prstGeom prst="rect">
-            <a:avLst/>
-          </a:prstGeom>
-          <a:noFill/>
-        </p:spPr>
-        <p:txBody>
-          <a:bodyPr wrap="square">
-            <a:spAutoFit/>
-          </a:bodyPr>
-          <a:lstStyle/>
-          <a:p>
-            <a:pPr algn="l"/>
-            <a:r>
-              <a:rPr sz="1200" b="1" i="0">
-                <a:solidFill>
-                  <a:srgbClr val="2563EB"/>
-                </a:solidFill>
-              </a:rPr>
-              <a:t>▸  Deep Learning (MLP)</a:t>
-            </a:r>
-          </a:p>
-        </p:txBody>
-      </p:sp>
-      <p:sp>
-        <p:nvSpPr>
-          <p:cNvPr id="34" name="TextBox 33"/>
-          <p:cNvSpPr txBox="1"/>
-          <p:nvPr/>
-        </p:nvSpPr>
-        <p:spPr>
-          <a:xfrm>
-            <a:off x="6903720" y="3858768"/>
-            <a:ext cx="4754880" cy="320040"/>
-          </a:xfrm>
-          <a:prstGeom prst="rect">
-            <a:avLst/>
-          </a:prstGeom>
-          <a:noFill/>
-        </p:spPr>
-        <p:txBody>
-          <a:bodyPr wrap="square">
-            <a:spAutoFit/>
-          </a:bodyPr>
-          <a:lstStyle/>
-          <a:p>
-            <a:pPr algn="l"/>
-            <a:r>
-              <a:rPr sz="1000" b="0" i="1">
-                <a:solidFill>
-                  <a:srgbClr val="64748B"/>
-                </a:solidFill>
-              </a:rPr>
-              <a:t>Réseau de neurones pour régression</a:t>
-            </a:r>
-          </a:p>
-        </p:txBody>
-      </p:sp>
-      <p:sp>
-        <p:nvSpPr>
-          <p:cNvPr id="35" name="Rectangle 34"/>
-          <p:cNvSpPr/>
-          <p:nvPr/>
-        </p:nvSpPr>
-        <p:spPr>
-          <a:xfrm>
-            <a:off x="6720840" y="4343400"/>
-            <a:ext cx="5029200" cy="749808"/>
-          </a:xfrm>
-          <a:prstGeom prst="rect">
-            <a:avLst/>
-          </a:prstGeom>
-          <a:solidFill>
-            <a:srgbClr val="0F2A50"/>
-          </a:solidFill>
-          <a:ln>
-            <a:noFill/>
-          </a:ln>
-        </p:spPr>
-        <p:style>
-          <a:lnRef idx="1">
-            <a:schemeClr val="accent1"/>
-          </a:lnRef>
-          <a:fillRef idx="3">
-            <a:schemeClr val="accent1"/>
-          </a:fillRef>
-          <a:effectRef idx="2">
-            <a:schemeClr val="accent1"/>
-          </a:effectRef>
-          <a:fontRef idx="minor">
-            <a:schemeClr val="lt1"/>
-          </a:fontRef>
-        </p:style>
-        <p:txBody>
-          <a:bodyPr rtlCol="0" anchor="ctr"/>
-          <a:lstStyle/>
-          <a:p>
-            <a:pPr algn="ctr"/>
-          </a:p>
-        </p:txBody>
-      </p:sp>
-      <p:sp>
-        <p:nvSpPr>
-          <p:cNvPr id="36" name="TextBox 35"/>
-          <p:cNvSpPr txBox="1"/>
-          <p:nvPr/>
-        </p:nvSpPr>
-        <p:spPr>
-          <a:xfrm>
-            <a:off x="6903720" y="4416552"/>
-            <a:ext cx="4754880" cy="347472"/>
-          </a:xfrm>
-          <a:prstGeom prst="rect">
-            <a:avLst/>
-          </a:prstGeom>
-          <a:noFill/>
-        </p:spPr>
-        <p:txBody>
-          <a:bodyPr wrap="square">
-            <a:spAutoFit/>
-          </a:bodyPr>
-          <a:lstStyle/>
-          <a:p>
-            <a:pPr algn="l"/>
-            <a:r>
-              <a:rPr sz="1200" b="1" i="0">
-                <a:solidFill>
-                  <a:srgbClr val="2563EB"/>
-                </a:solidFill>
-              </a:rPr>
-              <a:t>▸  Données supplémentaires</a:t>
-            </a:r>
-          </a:p>
-        </p:txBody>
-      </p:sp>
-      <p:sp>
-        <p:nvSpPr>
-          <p:cNvPr id="37" name="TextBox 36"/>
-          <p:cNvSpPr txBox="1"/>
-          <p:nvPr/>
-        </p:nvSpPr>
-        <p:spPr>
-          <a:xfrm>
-            <a:off x="6903720" y="4727448"/>
-            <a:ext cx="4754880" cy="320040"/>
-          </a:xfrm>
-          <a:prstGeom prst="rect">
-            <a:avLst/>
-          </a:prstGeom>
-          <a:noFill/>
-        </p:spPr>
-        <p:txBody>
-          <a:bodyPr wrap="square">
-            <a:spAutoFit/>
-          </a:bodyPr>
-          <a:lstStyle/>
-          <a:p>
-            <a:pPr algn="l"/>
-            <a:r>
-              <a:rPr sz="1000" b="0" i="1">
-                <a:solidFill>
-                  <a:srgbClr val="64748B"/>
-                </a:solidFill>
-              </a:rPr>
-              <a:t>Enrichir avec données géo/macro</a:t>
-            </a:r>
-          </a:p>
-        </p:txBody>
-      </p:sp>
-      <p:sp>
-        <p:nvSpPr>
-          <p:cNvPr id="38" name="Rectangle 37"/>
-          <p:cNvSpPr/>
-          <p:nvPr/>
-        </p:nvSpPr>
-        <p:spPr>
-          <a:xfrm>
-            <a:off x="6720840" y="5212080"/>
-            <a:ext cx="5029200" cy="749808"/>
-          </a:xfrm>
-          <a:prstGeom prst="rect">
-            <a:avLst/>
-          </a:prstGeom>
-          <a:solidFill>
-            <a:srgbClr val="0F2A50"/>
-          </a:solidFill>
-          <a:ln>
-            <a:noFill/>
-          </a:ln>
-        </p:spPr>
-        <p:style>
-          <a:lnRef idx="1">
-            <a:schemeClr val="accent1"/>
-          </a:lnRef>
-          <a:fillRef idx="3">
-            <a:schemeClr val="accent1"/>
-          </a:fillRef>
-          <a:effectRef idx="2">
-            <a:schemeClr val="accent1"/>
-          </a:effectRef>
-          <a:fontRef idx="minor">
-            <a:schemeClr val="lt1"/>
-          </a:fontRef>
-        </p:style>
-        <p:txBody>
-          <a:bodyPr rtlCol="0" anchor="ctr"/>
-          <a:lstStyle/>
-          <a:p>
-            <a:pPr algn="ctr"/>
-          </a:p>
-        </p:txBody>
-      </p:sp>
-      <p:sp>
-        <p:nvSpPr>
-          <p:cNvPr id="39" name="TextBox 38"/>
-          <p:cNvSpPr txBox="1"/>
-          <p:nvPr/>
-        </p:nvSpPr>
-        <p:spPr>
-          <a:xfrm>
-            <a:off x="6903720" y="5285232"/>
-            <a:ext cx="4754880" cy="347472"/>
-          </a:xfrm>
-          <a:prstGeom prst="rect">
-            <a:avLst/>
-          </a:prstGeom>
-          <a:noFill/>
-        </p:spPr>
-        <p:txBody>
-          <a:bodyPr wrap="square">
-            <a:spAutoFit/>
-          </a:bodyPr>
-          <a:lstStyle/>
-          <a:p>
-            <a:pPr algn="l"/>
-            <a:r>
-              <a:rPr sz="1200" b="1" i="0">
-                <a:solidFill>
-                  <a:srgbClr val="2563EB"/>
-                </a:solidFill>
-              </a:rPr>
-              <a:t>▸  API de prédiction</a:t>
-            </a:r>
-          </a:p>
-        </p:txBody>
-      </p:sp>
-      <p:sp>
-        <p:nvSpPr>
-          <p:cNvPr id="40" name="TextBox 39"/>
-          <p:cNvSpPr txBox="1"/>
-          <p:nvPr/>
-        </p:nvSpPr>
-        <p:spPr>
-          <a:xfrm>
-            <a:off x="6903720" y="5596128"/>
-            <a:ext cx="4754880" cy="320040"/>
-          </a:xfrm>
-          <a:prstGeom prst="rect">
-            <a:avLst/>
-          </a:prstGeom>
-          <a:noFill/>
-        </p:spPr>
-        <p:txBody>
-          <a:bodyPr wrap="square">
-            <a:spAutoFit/>
-          </a:bodyPr>
-          <a:lstStyle/>
-          <a:p>
-            <a:pPr algn="l"/>
-            <a:r>
-              <a:rPr sz="1000" b="0" i="1">
-                <a:solidFill>
-                  <a:srgbClr val="64748B"/>
-                </a:solidFill>
-              </a:rPr>
-              <a:t>Déploiement FastAPI + Streamlit</a:t>
-            </a:r>
-          </a:p>
-        </p:txBody>
-      </p:sp>
-      <p:sp>
-        <p:nvSpPr>
-          <p:cNvPr id="41" name="Rectangle 40"/>
-          <p:cNvSpPr/>
-          <p:nvPr/>
-        </p:nvSpPr>
-        <p:spPr>
-          <a:xfrm>
-            <a:off x="685800" y="6492240"/>
-            <a:ext cx="11292840" cy="36576"/>
-          </a:xfrm>
-          <a:prstGeom prst="rect">
-            <a:avLst/>
-          </a:prstGeom>
-          <a:solidFill>
-            <a:srgbClr val="2563EB"/>
-          </a:solidFill>
-          <a:ln>
-            <a:noFill/>
-          </a:ln>
-        </p:spPr>
-        <p:style>
-          <a:lnRef idx="1">
-            <a:schemeClr val="accent1"/>
-          </a:lnRef>
-          <a:fillRef idx="3">
-            <a:schemeClr val="accent1"/>
-          </a:fillRef>
-          <a:effectRef idx="2">
-            <a:schemeClr val="accent1"/>
-          </a:effectRef>
-          <a:fontRef idx="minor">
-            <a:schemeClr val="lt1"/>
-          </a:fontRef>
-        </p:style>
-        <p:txBody>
-          <a:bodyPr rtlCol="0" anchor="ctr"/>
-          <a:lstStyle/>
-          <a:p>
-            <a:pPr algn="ctr"/>
+            <a:endParaRPr/>
           </a:p>
         </p:txBody>
       </p:sp>
